--- a/CreditExplainer_발표자료_박건우.pptx
+++ b/CreditExplainer_발표자료_박건우.pptx
@@ -20,10 +20,9 @@
     <p:sldId id="268" r:id="rId14"/>
     <p:sldId id="269" r:id="rId15"/>
     <p:sldId id="270" r:id="rId16"/>
-    <p:sldId id="271" r:id="rId17"/>
   </p:sldIdLst>
   <p:notesMasterIdLst>
-    <p:notesMasterId r:id="rId18"/>
+    <p:notesMasterId r:id="rId17"/>
   </p:notesMasterIdLst>
   <p:sldSz cx="12192000" cy="6858000"/>
   <p:notesSz cx="6858000" cy="12192000"/>
@@ -123,351 +122,6 @@
 </file>
 
 <file path=ppt/charts/chart1.xml><?xml version="1.0" encoding="utf-8"?>
-<c:chartSpace xmlns:c="http://schemas.openxmlformats.org/drawingml/2006/chart" xmlns:a="http://schemas.openxmlformats.org/drawingml/2006/main" xmlns:r="http://schemas.openxmlformats.org/officeDocument/2006/relationships">
-  <c:date1904 val="0"/>
-  <c:roundedCorners val="1"/>
-  <c:chart>
-    <c:autoTitleDeleted val="1"/>
-    <c:plotArea>
-      <c:layout/>
-      <c:barChart>
-        <c:barDir val="col"/>
-        <c:grouping val="clustered"/>
-        <c:varyColors val="0"/>
-        <c:ser>
-          <c:idx val="0"/>
-          <c:order val="0"/>
-          <c:tx>
-            <c:strRef>
-              <c:f>Sheet1!$B$1</c:f>
-              <c:strCache>
-                <c:ptCount val="1"/>
-                <c:pt idx="0">
-                  <c:v>그룹 A — 3금융권 이용 (n=376)</c:v>
-                </c:pt>
-              </c:strCache>
-            </c:strRef>
-          </c:tx>
-          <c:spPr>
-            <a:solidFill>
-              <a:srgbClr val="2A78D6"/>
-            </a:solidFill>
-            <a:effectLst/>
-          </c:spPr>
-          <c:invertIfNegative val="0"/>
-          <c:dLbls>
-            <c:numFmt formatCode="0.00" sourceLinked="0"/>
-            <c:txPr>
-              <a:bodyPr/>
-              <a:lstStyle/>
-              <a:p>
-                <a:pPr>
-                  <a:defRPr b="0" i="0" strike="noStrike" sz="1000" u="none">
-                    <a:solidFill>
-                      <a:srgbClr val="404040"/>
-                    </a:solidFill>
-                    <a:latin typeface="Malgun Gothic"/>
-                  </a:defRPr>
-                </a:pPr>
-              </a:p>
-            </c:txPr>
-            <c:showLegendKey val="0"/>
-            <c:showVal val="1"/>
-            <c:showCatName val="0"/>
-            <c:showSerName val="0"/>
-            <c:showPercent val="0"/>
-            <c:showBubbleSize val="0"/>
-            <c:showLeaderLines val="0"/>
-          </c:dLbls>
-          <c:cat>
-            <c:multiLvlStrRef>
-              <c:f>Sheet1!$A$2:$A$4</c:f>
-              <c:multiLvlStrCache>
-                <c:ptCount val="3"/>
-                <c:lvl>
-                  <c:pt idx="0">
-                    <c:v>거절률</c:v>
-                  </c:pt>
-                  <c:pt idx="1">
-                    <c:v>FPR</c:v>
-                  </c:pt>
-                  <c:pt idx="2">
-                    <c:v>FNR</c:v>
-                  </c:pt>
-                </c:lvl>
-              </c:multiLvlStrCache>
-            </c:multiLvlStrRef>
-          </c:cat>
-          <c:val>
-            <c:numRef>
-              <c:f>Sheet1!$B$2:$B$4</c:f>
-              <c:numCache>
-                <c:formatCode>General</c:formatCode>
-                <c:ptCount val="3"/>
-                <c:pt idx="0">
-                  <c:v>31.91</c:v>
-                </c:pt>
-                <c:pt idx="1">
-                  <c:v>31.74</c:v>
-                </c:pt>
-                <c:pt idx="2">
-                  <c:v>65</c:v>
-                </c:pt>
-              </c:numCache>
-            </c:numRef>
-          </c:val>
-        </c:ser>
-        <c:ser>
-          <c:idx val="1"/>
-          <c:order val="1"/>
-          <c:tx>
-            <c:strRef>
-              <c:f>Sheet1!$C$1</c:f>
-              <c:strCache>
-                <c:ptCount val="1"/>
-                <c:pt idx="0">
-                  <c:v>그룹 B — 미이용 (n=39,716)</c:v>
-                </c:pt>
-              </c:strCache>
-            </c:strRef>
-          </c:tx>
-          <c:spPr>
-            <a:solidFill>
-              <a:srgbClr val="EB6834"/>
-            </a:solidFill>
-            <a:effectLst/>
-          </c:spPr>
-          <c:invertIfNegative val="0"/>
-          <c:dLbls>
-            <c:numFmt formatCode="0.00" sourceLinked="0"/>
-            <c:txPr>
-              <a:bodyPr/>
-              <a:lstStyle/>
-              <a:p>
-                <a:pPr>
-                  <a:defRPr b="0" i="0" strike="noStrike" sz="1000" u="none">
-                    <a:solidFill>
-                      <a:srgbClr val="404040"/>
-                    </a:solidFill>
-                    <a:latin typeface="Malgun Gothic"/>
-                  </a:defRPr>
-                </a:pPr>
-              </a:p>
-            </c:txPr>
-            <c:showLegendKey val="0"/>
-            <c:showVal val="1"/>
-            <c:showCatName val="0"/>
-            <c:showSerName val="0"/>
-            <c:showPercent val="0"/>
-            <c:showBubbleSize val="0"/>
-            <c:showLeaderLines val="0"/>
-          </c:dLbls>
-          <c:cat>
-            <c:multiLvlStrRef>
-              <c:f>Sheet1!$A$2:$A$4</c:f>
-              <c:multiLvlStrCache>
-                <c:ptCount val="3"/>
-                <c:lvl>
-                  <c:pt idx="0">
-                    <c:v>거절률</c:v>
-                  </c:pt>
-                  <c:pt idx="1">
-                    <c:v>FPR</c:v>
-                  </c:pt>
-                  <c:pt idx="2">
-                    <c:v>FNR</c:v>
-                  </c:pt>
-                </c:lvl>
-              </c:multiLvlStrCache>
-            </c:multiLvlStrRef>
-          </c:cat>
-          <c:val>
-            <c:numRef>
-              <c:f>Sheet1!$C$2:$C$4</c:f>
-              <c:numCache>
-                <c:formatCode>General</c:formatCode>
-                <c:ptCount val="3"/>
-                <c:pt idx="0">
-                  <c:v>0.51</c:v>
-                </c:pt>
-                <c:pt idx="1">
-                  <c:v>0.45</c:v>
-                </c:pt>
-                <c:pt idx="2">
-                  <c:v>69.44</c:v>
-                </c:pt>
-              </c:numCache>
-            </c:numRef>
-          </c:val>
-        </c:ser>
-        <c:dLbls>
-          <c:numFmt formatCode="0.00" sourceLinked="0"/>
-          <c:txPr>
-            <a:bodyPr/>
-            <a:lstStyle/>
-            <a:p>
-              <a:pPr>
-                <a:defRPr b="0" i="0" strike="noStrike" sz="1000" u="none">
-                  <a:solidFill>
-                    <a:srgbClr val="404040"/>
-                  </a:solidFill>
-                  <a:latin typeface="Malgun Gothic"/>
-                </a:defRPr>
-              </a:pPr>
-            </a:p>
-          </c:txPr>
-          <c:showLegendKey val="0"/>
-          <c:showVal val="1"/>
-          <c:showCatName val="0"/>
-          <c:showSerName val="0"/>
-          <c:showPercent val="0"/>
-          <c:showBubbleSize val="0"/>
-          <c:showLeaderLines val="0"/>
-        </c:dLbls>
-        <c:gapWidth val="150"/>
-        <c:overlap val="0"/>
-        <c:axId val="2094734554"/>
-        <c:axId val="2094734552"/>
-        <c:axId val="2094734556"/>
-      </c:barChart>
-      <c:catAx>
-        <c:axId val="2094734554"/>
-        <c:scaling>
-          <c:orientation val="minMax"/>
-        </c:scaling>
-        <c:delete val="0"/>
-        <c:axPos val="b"/>
-        <c:numFmt formatCode="General" sourceLinked="1"/>
-        <c:majorTickMark val="out"/>
-        <c:minorTickMark val="none"/>
-        <c:tickLblPos val="low"/>
-        <c:spPr>
-          <a:ln w="12700" cap="flat">
-            <a:solidFill>
-              <a:srgbClr val="888888"/>
-            </a:solidFill>
-            <a:prstDash val="solid"/>
-            <a:round/>
-          </a:ln>
-        </c:spPr>
-        <c:txPr>
-          <a:bodyPr/>
-          <a:lstStyle/>
-          <a:p>
-            <a:pPr>
-              <a:defRPr sz="1200" b="0" i="0" u="none" strike="noStrike">
-                <a:solidFill>
-                  <a:srgbClr val="1A1A1A"/>
-                </a:solidFill>
-                <a:latin typeface="Malgun Gothic"/>
-              </a:defRPr>
-            </a:pPr>
-            <a:endParaRPr lang="en-US"/>
-          </a:p>
-        </c:txPr>
-        <c:crossAx val="2094734552"/>
-        <c:crosses val="autoZero"/>
-        <c:auto val="1"/>
-        <c:lblAlgn val="ctr"/>
-        <c:noMultiLvlLbl val="1"/>
-      </c:catAx>
-      <c:valAx>
-        <c:axId val="2094734552"/>
-        <c:scaling>
-          <c:orientation val="minMax"/>
-          <c:max val="80"/>
-          <c:min val="0"/>
-        </c:scaling>
-        <c:delete val="0"/>
-        <c:axPos val="l"/>
-        <c:majorGridlines>
-          <c:spPr>
-            <a:ln w="6350" cap="flat">
-              <a:solidFill>
-                <a:srgbClr val="E5E5E5"/>
-              </a:solidFill>
-              <a:prstDash val="solid"/>
-              <a:round/>
-            </a:ln>
-          </c:spPr>
-        </c:majorGridlines>
-        <c:numFmt formatCode="General" sourceLinked="0"/>
-        <c:majorTickMark val="out"/>
-        <c:minorTickMark val="none"/>
-        <c:tickLblPos val="nextTo"/>
-        <c:spPr>
-          <a:ln w="12700" cap="flat">
-            <a:solidFill>
-              <a:srgbClr val="888888"/>
-            </a:solidFill>
-            <a:prstDash val="solid"/>
-            <a:round/>
-          </a:ln>
-        </c:spPr>
-        <c:txPr>
-          <a:bodyPr/>
-          <a:lstStyle/>
-          <a:p>
-            <a:pPr>
-              <a:defRPr sz="1000" b="0" i="0" u="none" strike="noStrike">
-                <a:solidFill>
-                  <a:srgbClr val="6B6B6B"/>
-                </a:solidFill>
-                <a:latin typeface="Malgun Gothic"/>
-              </a:defRPr>
-            </a:pPr>
-            <a:endParaRPr lang="en-US"/>
-          </a:p>
-        </c:txPr>
-        <c:crossAx val="2094734554"/>
-        <c:crosses val="autoZero"/>
-        <c:crossBetween val="between"/>
-      </c:valAx>
-      <c:spPr>
-        <a:noFill/>
-        <a:ln>
-          <a:noFill/>
-        </a:ln>
-        <a:effectLst/>
-      </c:spPr>
-    </c:plotArea>
-    <c:legend>
-      <c:legendPos val="b"/>
-      <c:overlay val="0"/>
-      <c:txPr>
-        <a:bodyPr/>
-        <a:lstStyle/>
-        <a:p>
-          <a:pPr>
-            <a:defRPr sz="1000">
-              <a:solidFill>
-                <a:srgbClr val="404040"/>
-              </a:solidFill>
-              <a:latin typeface="Malgun Gothic"/>
-              <a:cs typeface="Malgun Gothic"/>
-            </a:defRPr>
-          </a:pPr>
-          <a:endParaRPr lang="en-US"/>
-        </a:p>
-      </c:txPr>
-    </c:legend>
-    <c:plotVisOnly val="1"/>
-    <c:dispBlanksAs val="span"/>
-  </c:chart>
-  <c:spPr>
-    <a:noFill/>
-    <a:ln>
-      <a:noFill/>
-    </a:ln>
-    <a:effectLst/>
-  </c:spPr>
-  <c:externalData r:id="rId1">
-    <c:autoUpdate val="0"/>
-  </c:externalData>
-</c:chartSpace>
-</file>
-
-<file path=ppt/charts/chart2.xml><?xml version="1.0" encoding="utf-8"?>
 <c:chartSpace xmlns:c="http://schemas.openxmlformats.org/drawingml/2006/chart" xmlns:a="http://schemas.openxmlformats.org/drawingml/2006/main" xmlns:r="http://schemas.openxmlformats.org/officeDocument/2006/relationships">
   <c:date1904 val="0"/>
   <c:roundedCorners val="1"/>
@@ -1378,7 +1032,7 @@
           <a:p>
             <a:r>
               <a:rPr lang="en-US" dirty="0"/>
-              <a:t>1분. DP와 EO가 서로 다른 결론을 내는 게 이 슬라이드의 포인트 — 8주차 COMPAS(개발사 vs ProPublica) 논쟁과 연결.</a:t>
+              <a:t>1분. 한계를 먼저 말하는 것이 신뢰 전략. 상관 변수 건은 질문이 나오기 전에 선제 공개.</a:t>
             </a:r>
             <a:endParaRPr lang="en-US" dirty="0"/>
           </a:p>
@@ -1466,7 +1120,7 @@
           <a:p>
             <a:r>
               <a:rPr lang="en-US" dirty="0"/>
-              <a:t>1분. 한계를 먼저 말하는 것이 신뢰 전략. 상관 변수 건은 질문이 나오기 전에 선제 공개.</a:t>
+              <a:t>30초. 3줄 요약 후 질문 받기. 부록 2장(사면 실험, Q&amp;A 카드) 대기.</a:t>
             </a:r>
             <a:endParaRPr lang="en-US" dirty="0"/>
           </a:p>
@@ -1554,7 +1208,7 @@
           <a:p>
             <a:r>
               <a:rPr lang="en-US" dirty="0"/>
-              <a:t>30초. 3줄 요약 후 질문 받기. 부록 2장(사면 실험, Q&amp;A 카드) 대기.</a:t>
+              <a:t>질문 대응용. '사면이 모형을 왜곡하는가'라는 토의 주제를 직접 실험 — 이 데이터에서는 왜곡이 크지 않았고, 이유는 대리변수. 축 확대는 정직하게 고지.</a:t>
             </a:r>
             <a:endParaRPr lang="en-US" dirty="0"/>
           </a:p>
@@ -1642,7 +1296,7 @@
           <a:p>
             <a:r>
               <a:rPr lang="en-US" dirty="0"/>
-              <a:t>질문 대응용. '사면이 모형을 왜곡하는가'라는 토의 주제를 직접 실험 — 이 데이터에서는 왜곡이 크지 않았고, 이유는 대리변수. 축 확대는 정직하게 고지.</a:t>
+              <a:t>질문 대응용 카드. 각 답의 마지막 문장이 핵심 방어 논리.</a:t>
             </a:r>
             <a:endParaRPr lang="en-US" dirty="0"/>
           </a:p>
@@ -1666,94 +1320,6 @@
             <a:fld id="{F7021451-1387-4CA6-816F-3879F97B5CBC}" type="slidenum">
               <a:rPr lang="en-US"/>
               <a:t>15</a:t>
-            </a:fld>
-            <a:endParaRPr lang="en-US"/>
-          </a:p>
-        </p:txBody>
-      </p:sp>
-    </p:spTree>
-    <p:extLst>
-      <p:ext uri="{BB962C8B-B14F-4D97-AF65-F5344CB8AC3E}">
-        <p14:creationId xmlns:p14="http://schemas.microsoft.com/office/powerpoint/2010/main" val="1024086991"/>
-      </p:ext>
-    </p:extLst>
-  </p:cSld>
-  <p:clrMapOvr>
-    <a:masterClrMapping/>
-  </p:clrMapOvr>
-</p:notes>
-</file>
-
-<file path=ppt/notesSlides/notesSlide16.xml><?xml version="1.0" encoding="utf-8"?>
-<p:notes xmlns:a="http://schemas.openxmlformats.org/drawingml/2006/main" xmlns:r="http://schemas.openxmlformats.org/officeDocument/2006/relationships" xmlns:p="http://schemas.openxmlformats.org/presentationml/2006/main">
-  <p:cSld>
-    <p:spTree>
-      <p:nvGrpSpPr>
-        <p:cNvPr id="1" name=""/>
-        <p:cNvGrpSpPr/>
-        <p:nvPr/>
-      </p:nvGrpSpPr>
-      <p:grpSpPr>
-        <a:xfrm>
-          <a:off x="0" y="0"/>
-          <a:ext cx="0" cy="0"/>
-          <a:chOff x="0" y="0"/>
-          <a:chExt cx="0" cy="0"/>
-        </a:xfrm>
-      </p:grpSpPr>
-      <p:sp>
-        <p:nvSpPr>
-          <p:cNvPr id="2" name="Slide Image Placeholder 1"/>
-          <p:cNvSpPr>
-            <a:spLocks noGrp="1" noRot="1" noChangeAspect="1"/>
-          </p:cNvSpPr>
-          <p:nvPr>
-            <p:ph type="sldImg"/>
-          </p:nvPr>
-        </p:nvSpPr>
-        <p:spPr/>
-      </p:sp>
-      <p:sp>
-        <p:nvSpPr>
-          <p:cNvPr id="3" name="Notes Placeholder 2"/>
-          <p:cNvSpPr>
-            <a:spLocks noGrp="1"/>
-          </p:cNvSpPr>
-          <p:nvPr>
-            <p:ph type="body" idx="1"/>
-          </p:nvPr>
-        </p:nvSpPr>
-        <p:spPr/>
-        <p:txBody>
-          <a:bodyPr/>
-          <a:lstStyle/>
-          <a:p>
-            <a:r>
-              <a:rPr lang="en-US" dirty="0"/>
-              <a:t>질문 대응용 카드. 각 답의 마지막 문장이 핵심 방어 논리.</a:t>
-            </a:r>
-            <a:endParaRPr lang="en-US" dirty="0"/>
-          </a:p>
-        </p:txBody>
-      </p:sp>
-      <p:sp>
-        <p:nvSpPr>
-          <p:cNvPr id="4" name="Slide Number Placeholder 3"/>
-          <p:cNvSpPr>
-            <a:spLocks noGrp="1"/>
-          </p:cNvSpPr>
-          <p:nvPr>
-            <p:ph type="sldNum" sz="quarter" idx="10"/>
-          </p:nvPr>
-        </p:nvSpPr>
-        <p:spPr/>
-        <p:txBody>
-          <a:bodyPr/>
-          <a:lstStyle/>
-          <a:p>
-            <a:fld id="{F7021451-1387-4CA6-816F-3879F97B5CBC}" type="slidenum">
-              <a:rPr lang="en-US"/>
-              <a:t>16</a:t>
             </a:fld>
             <a:endParaRPr lang="en-US"/>
           </a:p>
@@ -1818,7 +1384,7 @@
           <a:p>
             <a:r>
               <a:rPr lang="en-US" dirty="0"/>
-              <a:t>20초. 두 과제가 별개가 아니라 하나의 여정임을 먼저 선언 — '성능을 만들고, 그 다음 신뢰를 만들었다'.</a:t>
+              <a:t>20초. Part 1은 성능 개선으로 완결, Part 2는 별도의 문제(설명력)를 다룸 — 연결은 '같은 데이터와 모형을 재사용한다' 수준으로만 언급.</a:t>
             </a:r>
             <a:endParaRPr lang="en-US" dirty="0"/>
           </a:p>
@@ -2082,7 +1648,7 @@
           <a:p>
             <a:r>
               <a:rPr lang="en-US" dirty="0"/>
-              <a:t>40초. Part 1→2 전환의 핵심 슬라이드. '실습 보고서에 스스로 남긴 숙제를 이어서 풀었다'는 프레임이 발표 전체의 스토리를 완성.</a:t>
+              <a:t>40초. Part 2의 독립적 문제 제기 — 소비자가 받는 설명의 현실(거절 문자) vs 블랙박스 trade-off vs 법의 요구. Part 1과의 연결은 '데이터와 모형 재사용' 한 줄로만 가볍게.</a:t>
             </a:r>
             <a:endParaRPr lang="en-US" dirty="0"/>
           </a:p>
@@ -2170,7 +1736,7 @@
           <a:p>
             <a:r>
               <a:rPr lang="en-US" dirty="0"/>
-              <a:t>40초. 브리지에서 법 조문을 이미 봤으므로 왼쪽은 규제 이름만 빠르게, 오른쪽 트레이드오프 중심으로. '규제가 수요를 법으로 만들어 준다'로 마무리.</a:t>
+              <a:t>40초. 앞 장의 두 문제가 '있으면 좋은 것'이 아니라 법적 의무임을 보여주는 슬라이드 — 왼쪽 규제 목록, 오른쪽은 모형의 현실. '규제가 수요를 법으로 만들어 준다'로 마무리.</a:t>
             </a:r>
             <a:endParaRPr lang="en-US" dirty="0"/>
           </a:p>
@@ -3340,7 +2906,7 @@
                 <a:ea typeface="Malgun Gothic" pitchFamily="34" charset="-122"/>
                 <a:cs typeface="Malgun Gothic" pitchFamily="34" charset="-120"/>
               </a:rPr>
-              <a:t>판단형 평가 → SHAP 근거 → AI 설명문 → 공정성 감사가 한 화면에</a:t>
+              <a:t>판단형 평가 → SHAP 근거 → AI 설명문이 한 화면에</a:t>
             </a:r>
             <a:endParaRPr lang="en-US" sz="1200" dirty="0"/>
           </a:p>
@@ -4019,7 +3585,7 @@
               <a:buNone/>
             </a:pPr>
             <a:r>
-              <a:rPr lang="en-US" sz="2600" b="1" dirty="0">
+              <a:rPr lang="en-US" sz="2800" b="1" dirty="0">
                 <a:solidFill>
                   <a:srgbClr val="1A1A1A"/>
                 </a:solidFill>
@@ -4027,105 +3593,126 @@
                 <a:ea typeface="Malgun Gothic" pitchFamily="34" charset="-122"/>
                 <a:cs typeface="Malgun Gothic" pitchFamily="34" charset="-120"/>
               </a:rPr>
-              <a:t>공정성 감사 — 격차는 차별의 증거가 아니라 조사 신호</a:t>
-            </a:r>
-            <a:endParaRPr lang="en-US" sz="2600" dirty="0"/>
-          </a:p>
-        </p:txBody>
-      </p:sp>
-      <p:graphicFrame>
-        <p:nvGraphicFramePr>
-          <p:cNvPr id="3" name="Chart 0" descr=""/>
-          <p:cNvGraphicFramePr/>
-          <p:nvPr/>
-        </p:nvGraphicFramePr>
-        <p:xfrm>
-          <a:off x="640080" y="1371600"/>
-          <a:ext cx="5852160" cy="4206240"/>
-        </p:xfrm>
-        <a:graphic xmlns:a="http://schemas.openxmlformats.org/drawingml/2006/main">
-          <a:graphicData uri="http://schemas.openxmlformats.org/drawingml/2006/chart">
-            <c:chart xmlns:c="http://schemas.openxmlformats.org/drawingml/2006/chart" r:id="rId1"/>
-          </a:graphicData>
-        </a:graphic>
-      </p:graphicFrame>
-      <p:sp>
-        <p:nvSpPr>
-          <p:cNvPr id="4" name="Text 1"/>
-          <p:cNvSpPr/>
-          <p:nvPr/>
-        </p:nvSpPr>
-        <p:spPr>
-          <a:xfrm>
-            <a:off x="6858000" y="1371600"/>
-            <a:ext cx="4709160" cy="777240"/>
-          </a:xfrm>
-          <a:prstGeom prst="rect">
-            <a:avLst/>
-          </a:prstGeom>
-          <a:noFill/>
-          <a:ln/>
-        </p:spPr>
-        <p:txBody>
-          <a:bodyPr wrap="square" lIns="0" tIns="0" rIns="0" bIns="0" rtlCol="0" anchor="ctr"/>
-          <a:lstStyle/>
-          <a:p>
-            <a:pPr indent="0" marL="0">
-              <a:lnSpc>
-                <a:spcPct val="115000"/>
-              </a:lnSpc>
-              <a:buNone/>
-            </a:pPr>
-            <a:r>
-              <a:rPr lang="en-US" sz="1200" b="1" dirty="0">
-                <a:solidFill>
-                  <a:srgbClr val="1A1A1A"/>
-                </a:solidFill>
-                <a:latin typeface="Malgun Gothic" pitchFamily="34" charset="0"/>
-                <a:ea typeface="Malgun Gothic" pitchFamily="34" charset="-122"/>
-                <a:cs typeface="Malgun Gothic" pitchFamily="34" charset="-120"/>
-              </a:rPr>
-              <a:t>그룹 A = 3금융권 대출 보유(n=376) · 그룹 B = 미보유(n=39,716)
-</a:t>
-            </a:r>
-            <a:endParaRPr lang="en-US" sz="1200" dirty="0"/>
-          </a:p>
-          <a:p>
-            <a:pPr indent="0" marL="0">
-              <a:lnSpc>
-                <a:spcPct val="115000"/>
-              </a:lnSpc>
-              <a:buNone/>
-            </a:pPr>
-            <a:r>
-              <a:rPr lang="en-US" sz="1100" dirty="0">
-                <a:solidFill>
-                  <a:srgbClr val="6B6B6B"/>
-                </a:solidFill>
-                <a:latin typeface="Malgun Gothic" pitchFamily="34" charset="0"/>
-                <a:ea typeface="Malgun Gothic" pitchFamily="34" charset="-122"/>
-                <a:cs typeface="Malgun Gothic" pitchFamily="34" charset="-120"/>
-              </a:rPr>
-              <a:t>인구통계 변수 부재(법상 배제) → 취약계층 프록시 세분화 — Apple Card '세분화 평가' 교훈</a:t>
-            </a:r>
-            <a:endParaRPr lang="en-US" sz="1200" dirty="0"/>
-          </a:p>
-        </p:txBody>
-      </p:sp>
-      <p:sp>
-        <p:nvSpPr>
-          <p:cNvPr id="5" name="Shape 2"/>
-          <p:cNvSpPr/>
-          <p:nvPr/>
-        </p:nvSpPr>
-        <p:spPr>
-          <a:xfrm>
-            <a:off x="6858000" y="2286000"/>
-            <a:ext cx="4709160" cy="841248"/>
+              <a:t>한계를 알고, 통제한다</a:t>
+            </a:r>
+            <a:endParaRPr lang="en-US" sz="2800" dirty="0"/>
+          </a:p>
+        </p:txBody>
+      </p:sp>
+      <p:sp>
+        <p:nvSpPr>
+          <p:cNvPr id="3" name="Shape 1"/>
+          <p:cNvSpPr/>
+          <p:nvPr/>
+        </p:nvSpPr>
+        <p:spPr>
+          <a:xfrm>
+            <a:off x="640080" y="1417320"/>
+            <a:ext cx="3108960" cy="1005840"/>
           </a:xfrm>
           <a:prstGeom prst="roundRect">
             <a:avLst>
-              <a:gd name="adj" fmla="val 8696"/>
+              <a:gd name="adj" fmla="val 9091"/>
+            </a:avLst>
+          </a:prstGeom>
+          <a:solidFill>
+            <a:srgbClr val="FBEBEB"/>
+          </a:solidFill>
+          <a:ln/>
+        </p:spPr>
+      </p:sp>
+      <p:sp>
+        <p:nvSpPr>
+          <p:cNvPr id="4" name="Text 2"/>
+          <p:cNvSpPr/>
+          <p:nvPr/>
+        </p:nvSpPr>
+        <p:spPr>
+          <a:xfrm>
+            <a:off x="868680" y="1417320"/>
+            <a:ext cx="2743200" cy="1005840"/>
+          </a:xfrm>
+          <a:prstGeom prst="rect">
+            <a:avLst/>
+          </a:prstGeom>
+          <a:noFill/>
+          <a:ln/>
+        </p:spPr>
+        <p:txBody>
+          <a:bodyPr wrap="square" lIns="0" tIns="0" rIns="0" bIns="0" rtlCol="0" anchor="ctr"/>
+          <a:lstStyle/>
+          <a:p>
+            <a:pPr indent="0" marL="0">
+              <a:buNone/>
+            </a:pPr>
+            <a:r>
+              <a:rPr lang="en-US" sz="1350" b="1" dirty="0">
+                <a:solidFill>
+                  <a:srgbClr val="8E1F1F"/>
+                </a:solidFill>
+                <a:latin typeface="Malgun Gothic" pitchFamily="34" charset="0"/>
+                <a:ea typeface="Malgun Gothic" pitchFamily="34" charset="-122"/>
+                <a:cs typeface="Malgun Gothic" pitchFamily="34" charset="-120"/>
+              </a:rPr>
+              <a:t>LLM 환각 가능성</a:t>
+            </a:r>
+            <a:endParaRPr lang="en-US" sz="1350" dirty="0"/>
+          </a:p>
+        </p:txBody>
+      </p:sp>
+      <p:sp>
+        <p:nvSpPr>
+          <p:cNvPr id="5" name="Text 3"/>
+          <p:cNvSpPr/>
+          <p:nvPr/>
+        </p:nvSpPr>
+        <p:spPr>
+          <a:xfrm>
+            <a:off x="3794760" y="1417320"/>
+            <a:ext cx="457200" cy="1005840"/>
+          </a:xfrm>
+          <a:prstGeom prst="rect">
+            <a:avLst/>
+          </a:prstGeom>
+          <a:noFill/>
+          <a:ln/>
+        </p:spPr>
+        <p:txBody>
+          <a:bodyPr wrap="square" lIns="0" tIns="0" rIns="0" bIns="0" rtlCol="0" anchor="ctr"/>
+          <a:lstStyle/>
+          <a:p>
+            <a:pPr algn="ctr" indent="0" marL="0">
+              <a:buNone/>
+            </a:pPr>
+            <a:r>
+              <a:rPr lang="en-US" sz="1600" b="1" dirty="0">
+                <a:solidFill>
+                  <a:srgbClr val="6B6B6B"/>
+                </a:solidFill>
+                <a:latin typeface="Malgun Gothic" pitchFamily="34" charset="0"/>
+                <a:ea typeface="Malgun Gothic" pitchFamily="34" charset="-122"/>
+                <a:cs typeface="Malgun Gothic" pitchFamily="34" charset="-120"/>
+              </a:rPr>
+              <a:t>→</a:t>
+            </a:r>
+            <a:endParaRPr lang="en-US" sz="1600" dirty="0"/>
+          </a:p>
+        </p:txBody>
+      </p:sp>
+      <p:sp>
+        <p:nvSpPr>
+          <p:cNvPr id="6" name="Shape 4"/>
+          <p:cNvSpPr/>
+          <p:nvPr/>
+        </p:nvSpPr>
+        <p:spPr>
+          <a:xfrm>
+            <a:off x="4297680" y="1417320"/>
+            <a:ext cx="7269480" cy="1005840"/>
+          </a:xfrm>
+          <a:prstGeom prst="roundRect">
+            <a:avLst>
+              <a:gd name="adj" fmla="val 9091"/>
             </a:avLst>
           </a:prstGeom>
           <a:solidFill>
@@ -4141,53 +3728,14 @@
       </p:sp>
       <p:sp>
         <p:nvSpPr>
-          <p:cNvPr id="6" name="Text 3"/>
-          <p:cNvSpPr/>
-          <p:nvPr/>
-        </p:nvSpPr>
-        <p:spPr>
-          <a:xfrm>
-            <a:off x="7059168" y="2286000"/>
-            <a:ext cx="1234440" cy="841248"/>
-          </a:xfrm>
-          <a:prstGeom prst="rect">
-            <a:avLst/>
-          </a:prstGeom>
-          <a:noFill/>
-          <a:ln/>
-        </p:spPr>
-        <p:txBody>
-          <a:bodyPr wrap="square" lIns="0" tIns="0" rIns="0" bIns="0" rtlCol="0" anchor="ctr"/>
-          <a:lstStyle/>
-          <a:p>
-            <a:pPr indent="0" marL="0">
-              <a:buNone/>
-            </a:pPr>
-            <a:r>
-              <a:rPr lang="en-US" sz="2200" b="1" dirty="0">
-                <a:solidFill>
-                  <a:srgbClr val="E34948"/>
-                </a:solidFill>
-                <a:latin typeface="Malgun Gothic" pitchFamily="34" charset="0"/>
-                <a:ea typeface="Malgun Gothic" pitchFamily="34" charset="-122"/>
-                <a:cs typeface="Malgun Gothic" pitchFamily="34" charset="-120"/>
-              </a:rPr>
-              <a:t>0.314</a:t>
-            </a:r>
-            <a:endParaRPr lang="en-US" sz="2200" dirty="0"/>
-          </a:p>
-        </p:txBody>
-      </p:sp>
-      <p:sp>
-        <p:nvSpPr>
-          <p:cNvPr id="7" name="Text 4"/>
-          <p:cNvSpPr/>
-          <p:nvPr/>
-        </p:nvSpPr>
-        <p:spPr>
-          <a:xfrm>
-            <a:off x="8366760" y="2359152"/>
-            <a:ext cx="3108960" cy="731520"/>
+          <p:cNvPr id="7" name="Text 5"/>
+          <p:cNvSpPr/>
+          <p:nvPr/>
+        </p:nvSpPr>
+        <p:spPr>
+          <a:xfrm>
+            <a:off x="4526280" y="1417320"/>
+            <a:ext cx="6858000" cy="1005840"/>
           </a:xfrm>
           <a:prstGeom prst="rect">
             <a:avLst/>
@@ -4201,12 +3749,12 @@
           <a:p>
             <a:pPr indent="0" marL="0">
               <a:lnSpc>
-                <a:spcPct val="115000"/>
+                <a:spcPct val="110000"/>
               </a:lnSpc>
               <a:buNone/>
             </a:pPr>
             <a:r>
-              <a:rPr lang="en-US" sz="1150" dirty="0">
+              <a:rPr lang="en-US" sz="1200" dirty="0">
                 <a:solidFill>
                   <a:srgbClr val="1A1A1A"/>
                 </a:solidFill>
@@ -4214,44 +3762,126 @@
                 <a:ea typeface="Malgun Gothic" pitchFamily="34" charset="-122"/>
                 <a:cs typeface="Malgun Gothic" pitchFamily="34" charset="-120"/>
               </a:rPr>
-              <a:t>거절률 격차 (Demographic Parity 관점)
-</a:t>
-            </a:r>
-            <a:pPr indent="0" marL="0">
-              <a:lnSpc>
-                <a:spcPct val="115000"/>
-              </a:lnSpc>
-              <a:buNone/>
-            </a:pPr>
-            <a:r>
-              <a:rPr lang="en-US" sz="1150" b="1" dirty="0">
-                <a:solidFill>
-                  <a:srgbClr val="E34948"/>
-                </a:solidFill>
-                <a:latin typeface="Malgun Gothic" pitchFamily="34" charset="0"/>
-                <a:ea typeface="Malgun Gothic" pitchFamily="34" charset="-122"/>
-                <a:cs typeface="Malgun Gothic" pitchFamily="34" charset="-120"/>
-              </a:rPr>
-              <a:t>→ 크다</a:t>
-            </a:r>
-            <a:endParaRPr lang="en-US" sz="1150" dirty="0"/>
-          </a:p>
-        </p:txBody>
-      </p:sp>
-      <p:sp>
-        <p:nvSpPr>
-          <p:cNvPr id="8" name="Shape 5"/>
-          <p:cNvSpPr/>
-          <p:nvPr/>
-        </p:nvSpPr>
-        <p:spPr>
-          <a:xfrm>
-            <a:off x="6858000" y="3255264"/>
-            <a:ext cx="4709160" cy="841248"/>
+              <a:t>템플릿 제약(입력 외 수치 금지) + HITL 검토 — 이번 3건 환각 0건, 실서비스도 사람 검토 후 발송 전제</a:t>
+            </a:r>
+            <a:endParaRPr lang="en-US" sz="1200" dirty="0"/>
+          </a:p>
+        </p:txBody>
+      </p:sp>
+      <p:sp>
+        <p:nvSpPr>
+          <p:cNvPr id="8" name="Shape 6"/>
+          <p:cNvSpPr/>
+          <p:nvPr/>
+        </p:nvSpPr>
+        <p:spPr>
+          <a:xfrm>
+            <a:off x="640080" y="2587752"/>
+            <a:ext cx="3108960" cy="1005840"/>
           </a:xfrm>
           <a:prstGeom prst="roundRect">
             <a:avLst>
-              <a:gd name="adj" fmla="val 8696"/>
+              <a:gd name="adj" fmla="val 9091"/>
+            </a:avLst>
+          </a:prstGeom>
+          <a:solidFill>
+            <a:srgbClr val="FBEBEB"/>
+          </a:solidFill>
+          <a:ln/>
+        </p:spPr>
+      </p:sp>
+      <p:sp>
+        <p:nvSpPr>
+          <p:cNvPr id="9" name="Text 7"/>
+          <p:cNvSpPr/>
+          <p:nvPr/>
+        </p:nvSpPr>
+        <p:spPr>
+          <a:xfrm>
+            <a:off x="868680" y="2587752"/>
+            <a:ext cx="2743200" cy="1005840"/>
+          </a:xfrm>
+          <a:prstGeom prst="rect">
+            <a:avLst/>
+          </a:prstGeom>
+          <a:noFill/>
+          <a:ln/>
+        </p:spPr>
+        <p:txBody>
+          <a:bodyPr wrap="square" lIns="0" tIns="0" rIns="0" bIns="0" rtlCol="0" anchor="ctr"/>
+          <a:lstStyle/>
+          <a:p>
+            <a:pPr indent="0" marL="0">
+              <a:buNone/>
+            </a:pPr>
+            <a:r>
+              <a:rPr lang="en-US" sz="1350" b="1" dirty="0">
+                <a:solidFill>
+                  <a:srgbClr val="8E1F1F"/>
+                </a:solidFill>
+                <a:latin typeface="Malgun Gothic" pitchFamily="34" charset="0"/>
+                <a:ea typeface="Malgun Gothic" pitchFamily="34" charset="-122"/>
+                <a:cs typeface="Malgun Gothic" pitchFamily="34" charset="-120"/>
+              </a:rPr>
+              <a:t>상관 변수의 SHAP 분산</a:t>
+            </a:r>
+            <a:endParaRPr lang="en-US" sz="1350" dirty="0"/>
+          </a:p>
+        </p:txBody>
+      </p:sp>
+      <p:sp>
+        <p:nvSpPr>
+          <p:cNvPr id="10" name="Text 8"/>
+          <p:cNvSpPr/>
+          <p:nvPr/>
+        </p:nvSpPr>
+        <p:spPr>
+          <a:xfrm>
+            <a:off x="3794760" y="2587752"/>
+            <a:ext cx="457200" cy="1005840"/>
+          </a:xfrm>
+          <a:prstGeom prst="rect">
+            <a:avLst/>
+          </a:prstGeom>
+          <a:noFill/>
+          <a:ln/>
+        </p:spPr>
+        <p:txBody>
+          <a:bodyPr wrap="square" lIns="0" tIns="0" rIns="0" bIns="0" rtlCol="0" anchor="ctr"/>
+          <a:lstStyle/>
+          <a:p>
+            <a:pPr algn="ctr" indent="0" marL="0">
+              <a:buNone/>
+            </a:pPr>
+            <a:r>
+              <a:rPr lang="en-US" sz="1600" b="1" dirty="0">
+                <a:solidFill>
+                  <a:srgbClr val="6B6B6B"/>
+                </a:solidFill>
+                <a:latin typeface="Malgun Gothic" pitchFamily="34" charset="0"/>
+                <a:ea typeface="Malgun Gothic" pitchFamily="34" charset="-122"/>
+                <a:cs typeface="Malgun Gothic" pitchFamily="34" charset="-120"/>
+              </a:rPr>
+              <a:t>→</a:t>
+            </a:r>
+            <a:endParaRPr lang="en-US" sz="1600" dirty="0"/>
+          </a:p>
+        </p:txBody>
+      </p:sp>
+      <p:sp>
+        <p:nvSpPr>
+          <p:cNvPr id="11" name="Shape 9"/>
+          <p:cNvSpPr/>
+          <p:nvPr/>
+        </p:nvSpPr>
+        <p:spPr>
+          <a:xfrm>
+            <a:off x="4297680" y="2587752"/>
+            <a:ext cx="7269480" cy="1005840"/>
+          </a:xfrm>
+          <a:prstGeom prst="roundRect">
+            <a:avLst>
+              <a:gd name="adj" fmla="val 9091"/>
             </a:avLst>
           </a:prstGeom>
           <a:solidFill>
@@ -4267,53 +3897,14 @@
       </p:sp>
       <p:sp>
         <p:nvSpPr>
-          <p:cNvPr id="9" name="Text 6"/>
-          <p:cNvSpPr/>
-          <p:nvPr/>
-        </p:nvSpPr>
-        <p:spPr>
-          <a:xfrm>
-            <a:off x="7059168" y="3255264"/>
-            <a:ext cx="1234440" cy="841248"/>
-          </a:xfrm>
-          <a:prstGeom prst="rect">
-            <a:avLst/>
-          </a:prstGeom>
-          <a:noFill/>
-          <a:ln/>
-        </p:spPr>
-        <p:txBody>
-          <a:bodyPr wrap="square" lIns="0" tIns="0" rIns="0" bIns="0" rtlCol="0" anchor="ctr"/>
-          <a:lstStyle/>
-          <a:p>
-            <a:pPr indent="0" marL="0">
-              <a:buNone/>
-            </a:pPr>
-            <a:r>
-              <a:rPr lang="en-US" sz="2200" b="1" dirty="0">
-                <a:solidFill>
-                  <a:srgbClr val="085041"/>
-                </a:solidFill>
-                <a:latin typeface="Malgun Gothic" pitchFamily="34" charset="0"/>
-                <a:ea typeface="Malgun Gothic" pitchFamily="34" charset="-122"/>
-                <a:cs typeface="Malgun Gothic" pitchFamily="34" charset="-120"/>
-              </a:rPr>
-              <a:t>0.044</a:t>
-            </a:r>
-            <a:endParaRPr lang="en-US" sz="2200" dirty="0"/>
-          </a:p>
-        </p:txBody>
-      </p:sp>
-      <p:sp>
-        <p:nvSpPr>
-          <p:cNvPr id="10" name="Text 7"/>
-          <p:cNvSpPr/>
-          <p:nvPr/>
-        </p:nvSpPr>
-        <p:spPr>
-          <a:xfrm>
-            <a:off x="8366760" y="3328416"/>
-            <a:ext cx="3108960" cy="731520"/>
+          <p:cNvPr id="12" name="Text 10"/>
+          <p:cNvSpPr/>
+          <p:nvPr/>
+        </p:nvSpPr>
+        <p:spPr>
+          <a:xfrm>
+            <a:off x="4526280" y="2587752"/>
+            <a:ext cx="6858000" cy="1005840"/>
           </a:xfrm>
           <a:prstGeom prst="rect">
             <a:avLst/>
@@ -4327,12 +3918,12 @@
           <a:p>
             <a:pPr indent="0" marL="0">
               <a:lnSpc>
-                <a:spcPct val="115000"/>
+                <a:spcPct val="110000"/>
               </a:lnSpc>
               <a:buNone/>
             </a:pPr>
             <a:r>
-              <a:rPr lang="en-US" sz="1150" dirty="0">
+              <a:rPr lang="en-US" sz="1200" dirty="0">
                 <a:solidFill>
                   <a:srgbClr val="1A1A1A"/>
                 </a:solidFill>
@@ -4340,44 +3931,126 @@
                 <a:ea typeface="Malgun Gothic" pitchFamily="34" charset="-122"/>
                 <a:cs typeface="Malgun Gothic" pitchFamily="34" charset="-120"/>
               </a:rPr>
-              <a:t>FNR 격차 (Equal Opportunity 관점)
-</a:t>
-            </a:r>
-            <a:pPr indent="0" marL="0">
-              <a:lnSpc>
-                <a:spcPct val="115000"/>
-              </a:lnSpc>
-              <a:buNone/>
-            </a:pPr>
-            <a:r>
-              <a:rPr lang="en-US" sz="1150" b="1" dirty="0">
-                <a:solidFill>
-                  <a:srgbClr val="085041"/>
-                </a:solidFill>
-                <a:latin typeface="Malgun Gothic" pitchFamily="34" charset="0"/>
-                <a:ea typeface="Malgun Gothic" pitchFamily="34" charset="-122"/>
-                <a:cs typeface="Malgun Gothic" pitchFamily="34" charset="-120"/>
-              </a:rPr>
-              <a:t>→ 작다</a:t>
-            </a:r>
-            <a:endParaRPr lang="en-US" sz="1150" dirty="0"/>
-          </a:p>
-        </p:txBody>
-      </p:sp>
-      <p:sp>
-        <p:nvSpPr>
-          <p:cNvPr id="11" name="Shape 8"/>
-          <p:cNvSpPr/>
-          <p:nvPr/>
-        </p:nvSpPr>
-        <p:spPr>
-          <a:xfrm>
-            <a:off x="6858000" y="4224528"/>
-            <a:ext cx="4709160" cy="841248"/>
+              <a:t>같은 값(연 22.9%)의 금리 변수 2개가 상반 방향으로 기여 — 트리 앙상블의 알려진 특성. 상관 변수 그룹 단위 SHAP 집계로 개선 예정</a:t>
+            </a:r>
+            <a:endParaRPr lang="en-US" sz="1200" dirty="0"/>
+          </a:p>
+        </p:txBody>
+      </p:sp>
+      <p:sp>
+        <p:nvSpPr>
+          <p:cNvPr id="13" name="Shape 11"/>
+          <p:cNvSpPr/>
+          <p:nvPr/>
+        </p:nvSpPr>
+        <p:spPr>
+          <a:xfrm>
+            <a:off x="640080" y="3758184"/>
+            <a:ext cx="3108960" cy="1005840"/>
           </a:xfrm>
           <a:prstGeom prst="roundRect">
             <a:avLst>
-              <a:gd name="adj" fmla="val 8696"/>
+              <a:gd name="adj" fmla="val 9091"/>
+            </a:avLst>
+          </a:prstGeom>
+          <a:solidFill>
+            <a:srgbClr val="FBEBEB"/>
+          </a:solidFill>
+          <a:ln/>
+        </p:spPr>
+      </p:sp>
+      <p:sp>
+        <p:nvSpPr>
+          <p:cNvPr id="14" name="Text 12"/>
+          <p:cNvSpPr/>
+          <p:nvPr/>
+        </p:nvSpPr>
+        <p:spPr>
+          <a:xfrm>
+            <a:off x="868680" y="3758184"/>
+            <a:ext cx="2743200" cy="1005840"/>
+          </a:xfrm>
+          <a:prstGeom prst="rect">
+            <a:avLst/>
+          </a:prstGeom>
+          <a:noFill/>
+          <a:ln/>
+        </p:spPr>
+        <p:txBody>
+          <a:bodyPr wrap="square" lIns="0" tIns="0" rIns="0" bIns="0" rtlCol="0" anchor="ctr"/>
+          <a:lstStyle/>
+          <a:p>
+            <a:pPr indent="0" marL="0">
+              <a:buNone/>
+            </a:pPr>
+            <a:r>
+              <a:rPr lang="en-US" sz="1350" b="1" dirty="0">
+                <a:solidFill>
+                  <a:srgbClr val="8E1F1F"/>
+                </a:solidFill>
+                <a:latin typeface="Malgun Gothic" pitchFamily="34" charset="0"/>
+                <a:ea typeface="Malgun Gothic" pitchFamily="34" charset="-122"/>
+                <a:cs typeface="Malgun Gothic" pitchFamily="34" charset="-120"/>
+              </a:rPr>
+              <a:t>정적 데모</a:t>
+            </a:r>
+            <a:endParaRPr lang="en-US" sz="1350" dirty="0"/>
+          </a:p>
+        </p:txBody>
+      </p:sp>
+      <p:sp>
+        <p:nvSpPr>
+          <p:cNvPr id="15" name="Text 13"/>
+          <p:cNvSpPr/>
+          <p:nvPr/>
+        </p:nvSpPr>
+        <p:spPr>
+          <a:xfrm>
+            <a:off x="3794760" y="3758184"/>
+            <a:ext cx="457200" cy="1005840"/>
+          </a:xfrm>
+          <a:prstGeom prst="rect">
+            <a:avLst/>
+          </a:prstGeom>
+          <a:noFill/>
+          <a:ln/>
+        </p:spPr>
+        <p:txBody>
+          <a:bodyPr wrap="square" lIns="0" tIns="0" rIns="0" bIns="0" rtlCol="0" anchor="ctr"/>
+          <a:lstStyle/>
+          <a:p>
+            <a:pPr algn="ctr" indent="0" marL="0">
+              <a:buNone/>
+            </a:pPr>
+            <a:r>
+              <a:rPr lang="en-US" sz="1600" b="1" dirty="0">
+                <a:solidFill>
+                  <a:srgbClr val="6B6B6B"/>
+                </a:solidFill>
+                <a:latin typeface="Malgun Gothic" pitchFamily="34" charset="0"/>
+                <a:ea typeface="Malgun Gothic" pitchFamily="34" charset="-122"/>
+                <a:cs typeface="Malgun Gothic" pitchFamily="34" charset="-120"/>
+              </a:rPr>
+              <a:t>→</a:t>
+            </a:r>
+            <a:endParaRPr lang="en-US" sz="1600" dirty="0"/>
+          </a:p>
+        </p:txBody>
+      </p:sp>
+      <p:sp>
+        <p:nvSpPr>
+          <p:cNvPr id="16" name="Shape 14"/>
+          <p:cNvSpPr/>
+          <p:nvPr/>
+        </p:nvSpPr>
+        <p:spPr>
+          <a:xfrm>
+            <a:off x="4297680" y="3758184"/>
+            <a:ext cx="7269480" cy="1005840"/>
+          </a:xfrm>
+          <a:prstGeom prst="roundRect">
+            <a:avLst>
+              <a:gd name="adj" fmla="val 9091"/>
             </a:avLst>
           </a:prstGeom>
           <a:solidFill>
@@ -4393,53 +4066,14 @@
       </p:sp>
       <p:sp>
         <p:nvSpPr>
-          <p:cNvPr id="12" name="Text 9"/>
-          <p:cNvSpPr/>
-          <p:nvPr/>
-        </p:nvSpPr>
-        <p:spPr>
-          <a:xfrm>
-            <a:off x="7059168" y="4224528"/>
-            <a:ext cx="1234440" cy="841248"/>
-          </a:xfrm>
-          <a:prstGeom prst="rect">
-            <a:avLst/>
-          </a:prstGeom>
-          <a:noFill/>
-          <a:ln/>
-        </p:spPr>
-        <p:txBody>
-          <a:bodyPr wrap="square" lIns="0" tIns="0" rIns="0" bIns="0" rtlCol="0" anchor="ctr"/>
-          <a:lstStyle/>
-          <a:p>
-            <a:pPr indent="0" marL="0">
-              <a:buNone/>
-            </a:pPr>
-            <a:r>
-              <a:rPr lang="en-US" sz="2200" b="1" dirty="0">
-                <a:solidFill>
-                  <a:srgbClr val="1E2761"/>
-                </a:solidFill>
-                <a:latin typeface="Malgun Gothic" pitchFamily="34" charset="0"/>
-                <a:ea typeface="Malgun Gothic" pitchFamily="34" charset="-122"/>
-                <a:cs typeface="Malgun Gothic" pitchFamily="34" charset="-120"/>
-              </a:rPr>
-              <a:t>29배</a:t>
-            </a:r>
-            <a:endParaRPr lang="en-US" sz="2200" dirty="0"/>
-          </a:p>
-        </p:txBody>
-      </p:sp>
-      <p:sp>
-        <p:nvSpPr>
-          <p:cNvPr id="13" name="Text 10"/>
-          <p:cNvSpPr/>
-          <p:nvPr/>
-        </p:nvSpPr>
-        <p:spPr>
-          <a:xfrm>
-            <a:off x="8366760" y="4297680"/>
-            <a:ext cx="3108960" cy="731520"/>
+          <p:cNvPr id="17" name="Text 15"/>
+          <p:cNvSpPr/>
+          <p:nvPr/>
+        </p:nvSpPr>
+        <p:spPr>
+          <a:xfrm>
+            <a:off x="4526280" y="3758184"/>
+            <a:ext cx="6858000" cy="1005840"/>
           </a:xfrm>
           <a:prstGeom prst="rect">
             <a:avLst/>
@@ -4453,12 +4087,12 @@
           <a:p>
             <a:pPr indent="0" marL="0">
               <a:lnSpc>
-                <a:spcPct val="115000"/>
+                <a:spcPct val="110000"/>
               </a:lnSpc>
               <a:buNone/>
             </a:pPr>
             <a:r>
-              <a:rPr lang="en-US" sz="1150" dirty="0">
+              <a:rPr lang="en-US" sz="1200" dirty="0">
                 <a:solidFill>
                   <a:srgbClr val="1A1A1A"/>
                 </a:solidFill>
@@ -4466,62 +4100,149 @@
                 <a:ea typeface="Malgun Gothic" pitchFamily="34" charset="-122"/>
                 <a:cs typeface="Malgun Gothic" pitchFamily="34" charset="-120"/>
               </a:rPr>
-              <a:t>실제 연체율 격차 — 5.32% vs 0.18%
-</a:t>
-            </a:r>
-            <a:pPr indent="0" marL="0">
-              <a:lnSpc>
-                <a:spcPct val="115000"/>
-              </a:lnSpc>
-              <a:buNone/>
-            </a:pPr>
-            <a:r>
-              <a:rPr lang="en-US" sz="1150" b="1" dirty="0">
-                <a:solidFill>
-                  <a:srgbClr val="1E2761"/>
-                </a:solidFill>
-                <a:latin typeface="Malgun Gothic" pitchFamily="34" charset="0"/>
-                <a:ea typeface="Malgun Gothic" pitchFamily="34" charset="-122"/>
-                <a:cs typeface="Malgun Gothic" pitchFamily="34" charset="-120"/>
-              </a:rPr>
-              <a:t>→ 위험 자체가 다름</a:t>
-            </a:r>
-            <a:endParaRPr lang="en-US" sz="1150" dirty="0"/>
-          </a:p>
-        </p:txBody>
-      </p:sp>
-      <p:sp>
-        <p:nvSpPr>
-          <p:cNvPr id="14" name="Shape 11"/>
-          <p:cNvSpPr/>
-          <p:nvPr/>
-        </p:nvSpPr>
-        <p:spPr>
-          <a:xfrm>
-            <a:off x="6858000" y="5257800"/>
-            <a:ext cx="4709160" cy="914400"/>
+              <a:t>시연은 사전 계산 결과의 재생(화면에 명시). 실시간 서비스화는 모형 서빙·키 관리 등 별도 MLOps 과제</a:t>
+            </a:r>
+            <a:endParaRPr lang="en-US" sz="1200" dirty="0"/>
+          </a:p>
+        </p:txBody>
+      </p:sp>
+      <p:sp>
+        <p:nvSpPr>
+          <p:cNvPr id="18" name="Shape 16"/>
+          <p:cNvSpPr/>
+          <p:nvPr/>
+        </p:nvSpPr>
+        <p:spPr>
+          <a:xfrm>
+            <a:off x="640080" y="4928616"/>
+            <a:ext cx="3108960" cy="1005840"/>
           </a:xfrm>
           <a:prstGeom prst="roundRect">
             <a:avLst>
-              <a:gd name="adj" fmla="val 10000"/>
+              <a:gd name="adj" fmla="val 9091"/>
             </a:avLst>
           </a:prstGeom>
           <a:solidFill>
-            <a:srgbClr val="E8F0FB"/>
+            <a:srgbClr val="FBEBEB"/>
           </a:solidFill>
           <a:ln/>
         </p:spPr>
       </p:sp>
       <p:sp>
         <p:nvSpPr>
-          <p:cNvPr id="15" name="Text 12"/>
-          <p:cNvSpPr/>
-          <p:nvPr/>
-        </p:nvSpPr>
-        <p:spPr>
-          <a:xfrm>
-            <a:off x="7086600" y="5303520"/>
-            <a:ext cx="4297680" cy="822960"/>
+          <p:cNvPr id="19" name="Text 17"/>
+          <p:cNvSpPr/>
+          <p:nvPr/>
+        </p:nvSpPr>
+        <p:spPr>
+          <a:xfrm>
+            <a:off x="868680" y="4928616"/>
+            <a:ext cx="2743200" cy="1005840"/>
+          </a:xfrm>
+          <a:prstGeom prst="rect">
+            <a:avLst/>
+          </a:prstGeom>
+          <a:noFill/>
+          <a:ln/>
+        </p:spPr>
+        <p:txBody>
+          <a:bodyPr wrap="square" lIns="0" tIns="0" rIns="0" bIns="0" rtlCol="0" anchor="ctr"/>
+          <a:lstStyle/>
+          <a:p>
+            <a:pPr indent="0" marL="0">
+              <a:buNone/>
+            </a:pPr>
+            <a:r>
+              <a:rPr lang="en-US" sz="1350" b="1" dirty="0">
+                <a:solidFill>
+                  <a:srgbClr val="8E1F1F"/>
+                </a:solidFill>
+                <a:latin typeface="Malgun Gothic" pitchFamily="34" charset="0"/>
+                <a:ea typeface="Malgun Gothic" pitchFamily="34" charset="-122"/>
+                <a:cs typeface="Malgun Gothic" pitchFamily="34" charset="-120"/>
+              </a:rPr>
+              <a:t>잔액 변수 단위 미상</a:t>
+            </a:r>
+            <a:endParaRPr lang="en-US" sz="1350" dirty="0"/>
+          </a:p>
+        </p:txBody>
+      </p:sp>
+      <p:sp>
+        <p:nvSpPr>
+          <p:cNvPr id="20" name="Text 18"/>
+          <p:cNvSpPr/>
+          <p:nvPr/>
+        </p:nvSpPr>
+        <p:spPr>
+          <a:xfrm>
+            <a:off x="3794760" y="4928616"/>
+            <a:ext cx="457200" cy="1005840"/>
+          </a:xfrm>
+          <a:prstGeom prst="rect">
+            <a:avLst/>
+          </a:prstGeom>
+          <a:noFill/>
+          <a:ln/>
+        </p:spPr>
+        <p:txBody>
+          <a:bodyPr wrap="square" lIns="0" tIns="0" rIns="0" bIns="0" rtlCol="0" anchor="ctr"/>
+          <a:lstStyle/>
+          <a:p>
+            <a:pPr algn="ctr" indent="0" marL="0">
+              <a:buNone/>
+            </a:pPr>
+            <a:r>
+              <a:rPr lang="en-US" sz="1600" b="1" dirty="0">
+                <a:solidFill>
+                  <a:srgbClr val="6B6B6B"/>
+                </a:solidFill>
+                <a:latin typeface="Malgun Gothic" pitchFamily="34" charset="0"/>
+                <a:ea typeface="Malgun Gothic" pitchFamily="34" charset="-122"/>
+                <a:cs typeface="Malgun Gothic" pitchFamily="34" charset="-120"/>
+              </a:rPr>
+              <a:t>→</a:t>
+            </a:r>
+            <a:endParaRPr lang="en-US" sz="1600" dirty="0"/>
+          </a:p>
+        </p:txBody>
+      </p:sp>
+      <p:sp>
+        <p:nvSpPr>
+          <p:cNvPr id="21" name="Shape 19"/>
+          <p:cNvSpPr/>
+          <p:nvPr/>
+        </p:nvSpPr>
+        <p:spPr>
+          <a:xfrm>
+            <a:off x="4297680" y="4928616"/>
+            <a:ext cx="7269480" cy="1005840"/>
+          </a:xfrm>
+          <a:prstGeom prst="roundRect">
+            <a:avLst>
+              <a:gd name="adj" fmla="val 9091"/>
+            </a:avLst>
+          </a:prstGeom>
+          <a:solidFill>
+            <a:srgbClr val="F5F7FA"/>
+          </a:solidFill>
+          <a:ln w="12700">
+            <a:solidFill>
+              <a:srgbClr val="DDDDDD"/>
+            </a:solidFill>
+            <a:prstDash val="solid"/>
+          </a:ln>
+        </p:spPr>
+      </p:sp>
+      <p:sp>
+        <p:nvSpPr>
+          <p:cNvPr id="22" name="Text 20"/>
+          <p:cNvSpPr/>
+          <p:nvPr/>
+        </p:nvSpPr>
+        <p:spPr>
+          <a:xfrm>
+            <a:off x="4526280" y="4928616"/>
+            <a:ext cx="6858000" cy="1005840"/>
           </a:xfrm>
           <a:prstGeom prst="rect">
             <a:avLst/>
@@ -4535,22 +4256,22 @@
           <a:p>
             <a:pPr indent="0" marL="0">
               <a:lnSpc>
-                <a:spcPct val="115000"/>
+                <a:spcPct val="110000"/>
               </a:lnSpc>
               <a:buNone/>
             </a:pPr>
             <a:r>
-              <a:rPr lang="en-US" sz="1150" b="1" dirty="0">
-                <a:solidFill>
-                  <a:srgbClr val="1E2761"/>
-                </a:solidFill>
-                <a:latin typeface="Malgun Gothic" pitchFamily="34" charset="0"/>
-                <a:ea typeface="Malgun Gothic" pitchFamily="34" charset="-122"/>
-                <a:cs typeface="Malgun Gothic" pitchFamily="34" charset="-120"/>
-              </a:rPr>
-              <a:t>어떤 공정성 정의를 쓰느냐에 따라 결론이 달라진다 (COMPAS, 8주차) — 격차는 후속 조사를 촉발하는 신호로 사용</a:t>
-            </a:r>
-            <a:endParaRPr lang="en-US" sz="1150" dirty="0"/>
+              <a:rPr lang="en-US" sz="1200" dirty="0">
+                <a:solidFill>
+                  <a:srgbClr val="1A1A1A"/>
+                </a:solidFill>
+                <a:latin typeface="Malgun Gothic" pitchFamily="34" charset="0"/>
+                <a:ea typeface="Malgun Gothic" pitchFamily="34" charset="-122"/>
+                <a:cs typeface="Malgun Gothic" pitchFamily="34" charset="-120"/>
+              </a:rPr>
+              <a:t>데이터 정의서 부재로 무단위 인용 — 실서비스 전 단위 확정 필요. 금리는 분포 검증으로 단위 확정(%×1000)</a:t>
+            </a:r>
+            <a:endParaRPr lang="en-US" sz="1200" dirty="0"/>
           </a:p>
         </p:txBody>
       </p:sp>
@@ -4565,6 +4286,235 @@
 <file path=ppt/slides/slide13.xml><?xml version="1.0" encoding="utf-8"?>
 <p:sld xmlns:a="http://schemas.openxmlformats.org/drawingml/2006/main" xmlns:r="http://schemas.openxmlformats.org/officeDocument/2006/relationships" xmlns:p="http://schemas.openxmlformats.org/presentationml/2006/main">
   <p:cSld name="Slide 13">
+    <p:bg>
+      <p:bgPr>
+        <a:solidFill>
+          <a:srgbClr val="1E2761"/>
+        </a:solidFill>
+      </p:bgPr>
+    </p:bg>
+    <p:spTree>
+      <p:nvGrpSpPr>
+        <p:cNvPr id="1" name=""/>
+        <p:cNvGrpSpPr/>
+        <p:nvPr/>
+      </p:nvGrpSpPr>
+      <p:grpSpPr>
+        <a:xfrm>
+          <a:off x="0" y="0"/>
+          <a:ext cx="0" cy="0"/>
+          <a:chOff x="0" y="0"/>
+          <a:chExt cx="0" cy="0"/>
+        </a:xfrm>
+      </p:grpSpPr>
+      <p:sp>
+        <p:nvSpPr>
+          <p:cNvPr id="2" name="Text 0"/>
+          <p:cNvSpPr/>
+          <p:nvPr/>
+        </p:nvSpPr>
+        <p:spPr>
+          <a:xfrm>
+            <a:off x="822960" y="1463040"/>
+            <a:ext cx="10515600" cy="1280160"/>
+          </a:xfrm>
+          <a:prstGeom prst="rect">
+            <a:avLst/>
+          </a:prstGeom>
+          <a:noFill/>
+          <a:ln/>
+        </p:spPr>
+        <p:txBody>
+          <a:bodyPr wrap="square" lIns="0" tIns="0" rIns="0" bIns="0" rtlCol="0" anchor="ctr"/>
+          <a:lstStyle/>
+          <a:p>
+            <a:pPr indent="0" marL="0">
+              <a:buNone/>
+            </a:pPr>
+            <a:r>
+              <a:rPr lang="en-US" sz="3300" b="1" dirty="0">
+                <a:solidFill>
+                  <a:srgbClr val="FFFFFF"/>
+                </a:solidFill>
+                <a:latin typeface="Malgun Gothic" pitchFamily="34" charset="0"/>
+                <a:ea typeface="Malgun Gothic" pitchFamily="34" charset="-122"/>
+                <a:cs typeface="Malgun Gothic" pitchFamily="34" charset="-120"/>
+              </a:rPr>
+              <a:t>AI 도입의 이유는 성능만이 아니라, 신뢰입니다</a:t>
+            </a:r>
+            <a:endParaRPr lang="en-US" sz="3300" dirty="0"/>
+          </a:p>
+        </p:txBody>
+      </p:sp>
+      <p:sp>
+        <p:nvSpPr>
+          <p:cNvPr id="3" name="Text 1"/>
+          <p:cNvSpPr/>
+          <p:nvPr/>
+        </p:nvSpPr>
+        <p:spPr>
+          <a:xfrm>
+            <a:off x="868680" y="3017520"/>
+            <a:ext cx="10424160" cy="2011680"/>
+          </a:xfrm>
+          <a:prstGeom prst="rect">
+            <a:avLst/>
+          </a:prstGeom>
+          <a:noFill/>
+          <a:ln/>
+        </p:spPr>
+        <p:txBody>
+          <a:bodyPr wrap="square" lIns="0" tIns="0" rIns="0" bIns="0" rtlCol="0" anchor="ctr"/>
+          <a:lstStyle/>
+          <a:p>
+            <a:pPr indent="0" marL="0">
+              <a:lnSpc>
+                <a:spcPct val="160000"/>
+              </a:lnSpc>
+              <a:buNone/>
+            </a:pPr>
+            <a:r>
+              <a:rPr lang="en-US" sz="1700" dirty="0">
+                <a:solidFill>
+                  <a:srgbClr val="CADCFC"/>
+                </a:solidFill>
+                <a:latin typeface="Malgun Gothic" pitchFamily="34" charset="0"/>
+                <a:ea typeface="Malgun Gothic" pitchFamily="34" charset="-122"/>
+                <a:cs typeface="Malgun Gothic" pitchFamily="34" charset="-120"/>
+              </a:rPr>
+              <a:t>1   성능 — 평가 프로토콜을 바로잡아야 진짜 개선이 보인다 (Part 1 · 실습과제)
+</a:t>
+            </a:r>
+            <a:endParaRPr lang="en-US" sz="1700" dirty="0"/>
+          </a:p>
+          <a:p>
+            <a:pPr indent="0" marL="0">
+              <a:lnSpc>
+                <a:spcPct val="160000"/>
+              </a:lnSpc>
+              <a:buNone/>
+            </a:pPr>
+            <a:r>
+              <a:rPr lang="en-US" sz="1700" dirty="0">
+                <a:solidFill>
+                  <a:srgbClr val="CADCFC"/>
+                </a:solidFill>
+                <a:latin typeface="Malgun Gothic" pitchFamily="34" charset="0"/>
+                <a:ea typeface="Malgun Gothic" pitchFamily="34" charset="-122"/>
+                <a:cs typeface="Malgun Gothic" pitchFamily="34" charset="-120"/>
+              </a:rPr>
+              <a:t>2   신뢰 — 판단형은 평가, XAI는 근거, 생성형은 번역, 사람은 최종 판단 (Part 2 · 발표과제)
+</a:t>
+            </a:r>
+            <a:endParaRPr lang="en-US" sz="1700" dirty="0"/>
+          </a:p>
+          <a:p>
+            <a:pPr indent="0" marL="0">
+              <a:lnSpc>
+                <a:spcPct val="160000"/>
+              </a:lnSpc>
+              <a:buNone/>
+            </a:pPr>
+            <a:r>
+              <a:rPr lang="en-US" sz="1700" dirty="0">
+                <a:solidFill>
+                  <a:srgbClr val="CADCFC"/>
+                </a:solidFill>
+                <a:latin typeface="Malgun Gothic" pitchFamily="34" charset="0"/>
+                <a:ea typeface="Malgun Gothic" pitchFamily="34" charset="-122"/>
+                <a:cs typeface="Malgun Gothic" pitchFamily="34" charset="-120"/>
+              </a:rPr>
+              <a:t>3   기회 — 설명요구권 대응이 곧 서비스, 규제는 비용이 아니라 기회다 (9주차)</a:t>
+            </a:r>
+            <a:endParaRPr lang="en-US" sz="1700" dirty="0"/>
+          </a:p>
+        </p:txBody>
+      </p:sp>
+      <p:sp>
+        <p:nvSpPr>
+          <p:cNvPr id="4" name="Text 2"/>
+          <p:cNvSpPr/>
+          <p:nvPr/>
+        </p:nvSpPr>
+        <p:spPr>
+          <a:xfrm>
+            <a:off x="868680" y="5760720"/>
+            <a:ext cx="10424160" cy="411480"/>
+          </a:xfrm>
+          <a:prstGeom prst="rect">
+            <a:avLst/>
+          </a:prstGeom>
+          <a:noFill/>
+          <a:ln/>
+        </p:spPr>
+        <p:txBody>
+          <a:bodyPr wrap="square" lIns="0" tIns="0" rIns="0" bIns="0" rtlCol="0" anchor="ctr"/>
+          <a:lstStyle/>
+          <a:p>
+            <a:pPr indent="0" marL="0">
+              <a:buNone/>
+            </a:pPr>
+            <a:r>
+              <a:rPr lang="en-US" sz="1300" dirty="0">
+                <a:solidFill>
+                  <a:srgbClr val="CADCFC"/>
+                </a:solidFill>
+                <a:latin typeface="Malgun Gothic" pitchFamily="34" charset="0"/>
+                <a:ea typeface="Malgun Gothic" pitchFamily="34" charset="-122"/>
+                <a:cs typeface="Malgun Gothic" pitchFamily="34" charset="-120"/>
+              </a:rPr>
+              <a:t>감사합니다  ·  데모: </a:t>
+            </a:r>
+            <a:pPr indent="0" marL="0">
+              <a:buNone/>
+            </a:pPr>
+            <a:r>
+              <a:rPr lang="en-US" sz="1300" u="sng" dirty="0">
+                <a:solidFill>
+                  <a:srgbClr val="FFFFFF"/>
+                </a:solidFill>
+                <a:latin typeface="Malgun Gothic" pitchFamily="34" charset="0"/>
+                <a:ea typeface="Malgun Gothic" pitchFamily="34" charset="-122"/>
+                <a:cs typeface="Malgun Gothic" pitchFamily="34" charset="-120"/>
+                <a:hlinkClick r:id="rId1" invalidUrl="" action="" tgtFrame="" tooltip="라이브 데모 열기" history="1" highlightClick="0" endSnd="0">
+                  <a:extLst>
+                    <a:ext uri="{A12FA001-AC4F-418D-AE19-62706E023703}">
+                      <ahyp:hlinkClr xmlns:ahyp="http://schemas.microsoft.com/office/drawing/2018/hyperlinkcolor" val="tx"/>
+                    </a:ext>
+                  </a:extLst>
+                </a:hlinkClick>
+              </a:rPr>
+              <a:t>credit-explainer-demo.vercel.app</a:t>
+            </a:r>
+            <a:pPr indent="0" marL="0">
+              <a:buNone/>
+            </a:pPr>
+            <a:r>
+              <a:rPr lang="en-US" sz="1300" dirty="0">
+                <a:solidFill>
+                  <a:srgbClr val="CADCFC"/>
+                </a:solidFill>
+                <a:latin typeface="Malgun Gothic" pitchFamily="34" charset="0"/>
+                <a:ea typeface="Malgun Gothic" pitchFamily="34" charset="-122"/>
+                <a:cs typeface="Malgun Gothic" pitchFamily="34" charset="-120"/>
+              </a:rPr>
+              <a:t>  ·  GitHub: gwpark-dev/credit-explainer</a:t>
+            </a:r>
+            <a:endParaRPr lang="en-US" sz="1300" dirty="0"/>
+          </a:p>
+        </p:txBody>
+      </p:sp>
+    </p:spTree>
+  </p:cSld>
+  <p:clrMapOvr>
+    <a:masterClrMapping/>
+  </p:clrMapOvr>
+</p:sld>
+</file>
+
+<file path=ppt/slides/slide14.xml><?xml version="1.0" encoding="utf-8"?>
+<p:sld xmlns:a="http://schemas.openxmlformats.org/drawingml/2006/main" xmlns:r="http://schemas.openxmlformats.org/officeDocument/2006/relationships" xmlns:p="http://schemas.openxmlformats.org/presentationml/2006/main">
+  <p:cSld name="Slide 14">
     <p:bg>
       <p:bgPr>
         <a:solidFill>
@@ -4611,7 +4561,7 @@
               <a:buNone/>
             </a:pPr>
             <a:r>
-              <a:rPr lang="en-US" sz="2800" b="1" dirty="0">
+              <a:rPr lang="en-US" sz="2200" b="1" dirty="0">
                 <a:solidFill>
                   <a:srgbClr val="1A1A1A"/>
                 </a:solidFill>
@@ -4619,126 +4569,42 @@
                 <a:ea typeface="Malgun Gothic" pitchFamily="34" charset="-122"/>
                 <a:cs typeface="Malgun Gothic" pitchFamily="34" charset="-120"/>
               </a:rPr>
-              <a:t>한계를 알고, 통제한다</a:t>
-            </a:r>
-            <a:endParaRPr lang="en-US" sz="2800" dirty="0"/>
-          </a:p>
-        </p:txBody>
-      </p:sp>
-      <p:sp>
-        <p:nvSpPr>
-          <p:cNvPr id="3" name="Shape 1"/>
-          <p:cNvSpPr/>
-          <p:nvPr/>
-        </p:nvSpPr>
-        <p:spPr>
-          <a:xfrm>
-            <a:off x="640080" y="1417320"/>
-            <a:ext cx="3108960" cy="1005840"/>
+              <a:t>부록 A — 신용사면 시뮬레이션: 기록을 지워도 모형은 우회 학습한다</a:t>
+            </a:r>
+            <a:endParaRPr lang="en-US" sz="2200" dirty="0"/>
+          </a:p>
+        </p:txBody>
+      </p:sp>
+      <p:graphicFrame>
+        <p:nvGraphicFramePr>
+          <p:cNvPr id="3" name="Chart 0" descr=""/>
+          <p:cNvGraphicFramePr/>
+          <p:nvPr/>
+        </p:nvGraphicFramePr>
+        <p:xfrm>
+          <a:off x="640080" y="1371600"/>
+          <a:ext cx="5852160" cy="4206240"/>
+        </p:xfrm>
+        <a:graphic xmlns:a="http://schemas.openxmlformats.org/drawingml/2006/main">
+          <a:graphicData uri="http://schemas.openxmlformats.org/drawingml/2006/chart">
+            <c:chart xmlns:c="http://schemas.openxmlformats.org/drawingml/2006/chart" r:id="rId1"/>
+          </a:graphicData>
+        </a:graphic>
+      </p:graphicFrame>
+      <p:sp>
+        <p:nvSpPr>
+          <p:cNvPr id="4" name="Shape 1"/>
+          <p:cNvSpPr/>
+          <p:nvPr/>
+        </p:nvSpPr>
+        <p:spPr>
+          <a:xfrm>
+            <a:off x="6858000" y="1417320"/>
+            <a:ext cx="4709160" cy="1371600"/>
           </a:xfrm>
           <a:prstGeom prst="roundRect">
             <a:avLst>
-              <a:gd name="adj" fmla="val 9091"/>
-            </a:avLst>
-          </a:prstGeom>
-          <a:solidFill>
-            <a:srgbClr val="FBEBEB"/>
-          </a:solidFill>
-          <a:ln/>
-        </p:spPr>
-      </p:sp>
-      <p:sp>
-        <p:nvSpPr>
-          <p:cNvPr id="4" name="Text 2"/>
-          <p:cNvSpPr/>
-          <p:nvPr/>
-        </p:nvSpPr>
-        <p:spPr>
-          <a:xfrm>
-            <a:off x="868680" y="1417320"/>
-            <a:ext cx="2743200" cy="1005840"/>
-          </a:xfrm>
-          <a:prstGeom prst="rect">
-            <a:avLst/>
-          </a:prstGeom>
-          <a:noFill/>
-          <a:ln/>
-        </p:spPr>
-        <p:txBody>
-          <a:bodyPr wrap="square" lIns="0" tIns="0" rIns="0" bIns="0" rtlCol="0" anchor="ctr"/>
-          <a:lstStyle/>
-          <a:p>
-            <a:pPr indent="0" marL="0">
-              <a:buNone/>
-            </a:pPr>
-            <a:r>
-              <a:rPr lang="en-US" sz="1350" b="1" dirty="0">
-                <a:solidFill>
-                  <a:srgbClr val="8E1F1F"/>
-                </a:solidFill>
-                <a:latin typeface="Malgun Gothic" pitchFamily="34" charset="0"/>
-                <a:ea typeface="Malgun Gothic" pitchFamily="34" charset="-122"/>
-                <a:cs typeface="Malgun Gothic" pitchFamily="34" charset="-120"/>
-              </a:rPr>
-              <a:t>LLM 환각 가능성</a:t>
-            </a:r>
-            <a:endParaRPr lang="en-US" sz="1350" dirty="0"/>
-          </a:p>
-        </p:txBody>
-      </p:sp>
-      <p:sp>
-        <p:nvSpPr>
-          <p:cNvPr id="5" name="Text 3"/>
-          <p:cNvSpPr/>
-          <p:nvPr/>
-        </p:nvSpPr>
-        <p:spPr>
-          <a:xfrm>
-            <a:off x="3794760" y="1417320"/>
-            <a:ext cx="457200" cy="1005840"/>
-          </a:xfrm>
-          <a:prstGeom prst="rect">
-            <a:avLst/>
-          </a:prstGeom>
-          <a:noFill/>
-          <a:ln/>
-        </p:spPr>
-        <p:txBody>
-          <a:bodyPr wrap="square" lIns="0" tIns="0" rIns="0" bIns="0" rtlCol="0" anchor="ctr"/>
-          <a:lstStyle/>
-          <a:p>
-            <a:pPr algn="ctr" indent="0" marL="0">
-              <a:buNone/>
-            </a:pPr>
-            <a:r>
-              <a:rPr lang="en-US" sz="1600" b="1" dirty="0">
-                <a:solidFill>
-                  <a:srgbClr val="6B6B6B"/>
-                </a:solidFill>
-                <a:latin typeface="Malgun Gothic" pitchFamily="34" charset="0"/>
-                <a:ea typeface="Malgun Gothic" pitchFamily="34" charset="-122"/>
-                <a:cs typeface="Malgun Gothic" pitchFamily="34" charset="-120"/>
-              </a:rPr>
-              <a:t>→</a:t>
-            </a:r>
-            <a:endParaRPr lang="en-US" sz="1600" dirty="0"/>
-          </a:p>
-        </p:txBody>
-      </p:sp>
-      <p:sp>
-        <p:nvSpPr>
-          <p:cNvPr id="6" name="Shape 4"/>
-          <p:cNvSpPr/>
-          <p:nvPr/>
-        </p:nvSpPr>
-        <p:spPr>
-          <a:xfrm>
-            <a:off x="4297680" y="1417320"/>
-            <a:ext cx="7269480" cy="1005840"/>
-          </a:xfrm>
-          <a:prstGeom prst="roundRect">
-            <a:avLst>
-              <a:gd name="adj" fmla="val 9091"/>
+              <a:gd name="adj" fmla="val 6667"/>
             </a:avLst>
           </a:prstGeom>
           <a:solidFill>
@@ -4754,14 +4620,97 @@
       </p:sp>
       <p:sp>
         <p:nvSpPr>
-          <p:cNvPr id="7" name="Text 5"/>
-          <p:cNvSpPr/>
-          <p:nvPr/>
-        </p:nvSpPr>
-        <p:spPr>
-          <a:xfrm>
-            <a:off x="4526280" y="1417320"/>
-            <a:ext cx="6858000" cy="1005840"/>
+          <p:cNvPr id="5" name="Shape 2"/>
+          <p:cNvSpPr/>
+          <p:nvPr/>
+        </p:nvSpPr>
+        <p:spPr>
+          <a:xfrm>
+            <a:off x="7059168" y="1581912"/>
+            <a:ext cx="384048" cy="384048"/>
+          </a:xfrm>
+          <a:prstGeom prst="ellipse">
+            <a:avLst/>
+          </a:prstGeom>
+          <a:solidFill>
+            <a:srgbClr val="1E2761"/>
+          </a:solidFill>
+          <a:ln/>
+        </p:spPr>
+      </p:sp>
+      <p:pic>
+        <p:nvPicPr>
+          <p:cNvPr id="6" name="Image 0" descr="/home/claude/icon_flask.png">    </p:cNvPr>
+          <p:cNvPicPr>
+            <a:picLocks noChangeAspect="1"/>
+          </p:cNvPicPr>
+          <p:nvPr/>
+        </p:nvPicPr>
+        <p:blipFill>
+          <a:blip r:embed="rId2"/>
+          <a:stretch>
+            <a:fillRect/>
+          </a:stretch>
+        </p:blipFill>
+        <p:spPr>
+          <a:xfrm>
+            <a:off x="7155180" y="1677924"/>
+            <a:ext cx="192024" cy="192024"/>
+          </a:xfrm>
+          <a:prstGeom prst="rect">
+            <a:avLst/>
+          </a:prstGeom>
+        </p:spPr>
+      </p:pic>
+      <p:sp>
+        <p:nvSpPr>
+          <p:cNvPr id="7" name="Text 3"/>
+          <p:cNvSpPr/>
+          <p:nvPr/>
+        </p:nvSpPr>
+        <p:spPr>
+          <a:xfrm>
+            <a:off x="7571232" y="1581912"/>
+            <a:ext cx="3749040" cy="384048"/>
+          </a:xfrm>
+          <a:prstGeom prst="rect">
+            <a:avLst/>
+          </a:prstGeom>
+          <a:noFill/>
+          <a:ln/>
+        </p:spPr>
+        <p:txBody>
+          <a:bodyPr wrap="square" lIns="0" tIns="0" rIns="0" bIns="0" rtlCol="0" anchor="ctr"/>
+          <a:lstStyle/>
+          <a:p>
+            <a:pPr indent="0" marL="0">
+              <a:buNone/>
+            </a:pPr>
+            <a:r>
+              <a:rPr lang="en-US" sz="1300" b="1" dirty="0">
+                <a:solidFill>
+                  <a:srgbClr val="1E2761"/>
+                </a:solidFill>
+                <a:latin typeface="Malgun Gothic" pitchFamily="34" charset="0"/>
+                <a:ea typeface="Malgun Gothic" pitchFamily="34" charset="-122"/>
+                <a:cs typeface="Malgun Gothic" pitchFamily="34" charset="-120"/>
+              </a:rPr>
+              <a:t>설계</a:t>
+            </a:r>
+            <a:endParaRPr lang="en-US" sz="1300" dirty="0"/>
+          </a:p>
+        </p:txBody>
+      </p:sp>
+      <p:sp>
+        <p:nvSpPr>
+          <p:cNvPr id="8" name="Text 4"/>
+          <p:cNvSpPr/>
+          <p:nvPr/>
+        </p:nvSpPr>
+        <p:spPr>
+          <a:xfrm>
+            <a:off x="7086600" y="1984248"/>
+            <a:ext cx="4251960" cy="777240"/>
           </a:xfrm>
           <a:prstGeom prst="rect">
             <a:avLst/>
@@ -4775,12 +4724,12 @@
           <a:p>
             <a:pPr indent="0" marL="0">
               <a:lnSpc>
-                <a:spcPct val="110000"/>
+                <a:spcPct val="112000"/>
               </a:lnSpc>
               <a:buNone/>
             </a:pPr>
             <a:r>
-              <a:rPr lang="en-US" sz="1200" dirty="0">
+              <a:rPr lang="en-US" sz="1100" dirty="0">
                 <a:solidFill>
                   <a:srgbClr val="1A1A1A"/>
                 </a:solidFill>
@@ -4788,126 +4737,26 @@
                 <a:ea typeface="Malgun Gothic" pitchFamily="34" charset="-122"/>
                 <a:cs typeface="Malgun Gothic" pitchFamily="34" charset="-120"/>
               </a:rPr>
-              <a:t>템플릿 제약(입력 외 수치 금지) + HITL 검토 — 이번 3건 환각 0건, 실서비스도 사람 검토 후 발송 전제</a:t>
-            </a:r>
-            <a:endParaRPr lang="en-US" sz="1200" dirty="0"/>
-          </a:p>
-        </p:txBody>
-      </p:sp>
-      <p:sp>
-        <p:nvSpPr>
-          <p:cNvPr id="8" name="Shape 6"/>
-          <p:cNvSpPr/>
-          <p:nvPr/>
-        </p:nvSpPr>
-        <p:spPr>
-          <a:xfrm>
-            <a:off x="640080" y="2587752"/>
-            <a:ext cx="3108960" cy="1005840"/>
+              <a:t>현재연체자 2,729명(향후 연체율 3.08%, 정상군의 16배)의 연체기록 4개 변수를 삭제 후 재학습·재평가 — 9주차 토의의 실증</a:t>
+            </a:r>
+            <a:endParaRPr lang="en-US" sz="1100" dirty="0"/>
+          </a:p>
+        </p:txBody>
+      </p:sp>
+      <p:sp>
+        <p:nvSpPr>
+          <p:cNvPr id="9" name="Shape 5"/>
+          <p:cNvSpPr/>
+          <p:nvPr/>
+        </p:nvSpPr>
+        <p:spPr>
+          <a:xfrm>
+            <a:off x="6858000" y="2953512"/>
+            <a:ext cx="4709160" cy="1371600"/>
           </a:xfrm>
           <a:prstGeom prst="roundRect">
             <a:avLst>
-              <a:gd name="adj" fmla="val 9091"/>
-            </a:avLst>
-          </a:prstGeom>
-          <a:solidFill>
-            <a:srgbClr val="FBEBEB"/>
-          </a:solidFill>
-          <a:ln/>
-        </p:spPr>
-      </p:sp>
-      <p:sp>
-        <p:nvSpPr>
-          <p:cNvPr id="9" name="Text 7"/>
-          <p:cNvSpPr/>
-          <p:nvPr/>
-        </p:nvSpPr>
-        <p:spPr>
-          <a:xfrm>
-            <a:off x="868680" y="2587752"/>
-            <a:ext cx="2743200" cy="1005840"/>
-          </a:xfrm>
-          <a:prstGeom prst="rect">
-            <a:avLst/>
-          </a:prstGeom>
-          <a:noFill/>
-          <a:ln/>
-        </p:spPr>
-        <p:txBody>
-          <a:bodyPr wrap="square" lIns="0" tIns="0" rIns="0" bIns="0" rtlCol="0" anchor="ctr"/>
-          <a:lstStyle/>
-          <a:p>
-            <a:pPr indent="0" marL="0">
-              <a:buNone/>
-            </a:pPr>
-            <a:r>
-              <a:rPr lang="en-US" sz="1350" b="1" dirty="0">
-                <a:solidFill>
-                  <a:srgbClr val="8E1F1F"/>
-                </a:solidFill>
-                <a:latin typeface="Malgun Gothic" pitchFamily="34" charset="0"/>
-                <a:ea typeface="Malgun Gothic" pitchFamily="34" charset="-122"/>
-                <a:cs typeface="Malgun Gothic" pitchFamily="34" charset="-120"/>
-              </a:rPr>
-              <a:t>상관 변수의 SHAP 분산</a:t>
-            </a:r>
-            <a:endParaRPr lang="en-US" sz="1350" dirty="0"/>
-          </a:p>
-        </p:txBody>
-      </p:sp>
-      <p:sp>
-        <p:nvSpPr>
-          <p:cNvPr id="10" name="Text 8"/>
-          <p:cNvSpPr/>
-          <p:nvPr/>
-        </p:nvSpPr>
-        <p:spPr>
-          <a:xfrm>
-            <a:off x="3794760" y="2587752"/>
-            <a:ext cx="457200" cy="1005840"/>
-          </a:xfrm>
-          <a:prstGeom prst="rect">
-            <a:avLst/>
-          </a:prstGeom>
-          <a:noFill/>
-          <a:ln/>
-        </p:spPr>
-        <p:txBody>
-          <a:bodyPr wrap="square" lIns="0" tIns="0" rIns="0" bIns="0" rtlCol="0" anchor="ctr"/>
-          <a:lstStyle/>
-          <a:p>
-            <a:pPr algn="ctr" indent="0" marL="0">
-              <a:buNone/>
-            </a:pPr>
-            <a:r>
-              <a:rPr lang="en-US" sz="1600" b="1" dirty="0">
-                <a:solidFill>
-                  <a:srgbClr val="6B6B6B"/>
-                </a:solidFill>
-                <a:latin typeface="Malgun Gothic" pitchFamily="34" charset="0"/>
-                <a:ea typeface="Malgun Gothic" pitchFamily="34" charset="-122"/>
-                <a:cs typeface="Malgun Gothic" pitchFamily="34" charset="-120"/>
-              </a:rPr>
-              <a:t>→</a:t>
-            </a:r>
-            <a:endParaRPr lang="en-US" sz="1600" dirty="0"/>
-          </a:p>
-        </p:txBody>
-      </p:sp>
-      <p:sp>
-        <p:nvSpPr>
-          <p:cNvPr id="11" name="Shape 9"/>
-          <p:cNvSpPr/>
-          <p:nvPr/>
-        </p:nvSpPr>
-        <p:spPr>
-          <a:xfrm>
-            <a:off x="4297680" y="2587752"/>
-            <a:ext cx="7269480" cy="1005840"/>
-          </a:xfrm>
-          <a:prstGeom prst="roundRect">
-            <a:avLst>
-              <a:gd name="adj" fmla="val 9091"/>
+              <a:gd name="adj" fmla="val 6667"/>
             </a:avLst>
           </a:prstGeom>
           <a:solidFill>
@@ -4923,14 +4772,97 @@
       </p:sp>
       <p:sp>
         <p:nvSpPr>
-          <p:cNvPr id="12" name="Text 10"/>
-          <p:cNvSpPr/>
-          <p:nvPr/>
-        </p:nvSpPr>
-        <p:spPr>
-          <a:xfrm>
-            <a:off x="4526280" y="2587752"/>
-            <a:ext cx="6858000" cy="1005840"/>
+          <p:cNvPr id="10" name="Shape 6"/>
+          <p:cNvSpPr/>
+          <p:nvPr/>
+        </p:nvSpPr>
+        <p:spPr>
+          <a:xfrm>
+            <a:off x="7059168" y="3118104"/>
+            <a:ext cx="384048" cy="384048"/>
+          </a:xfrm>
+          <a:prstGeom prst="ellipse">
+            <a:avLst/>
+          </a:prstGeom>
+          <a:solidFill>
+            <a:srgbClr val="1E2761"/>
+          </a:solidFill>
+          <a:ln/>
+        </p:spPr>
+      </p:sp>
+      <p:pic>
+        <p:nvPicPr>
+          <p:cNvPr id="11" name="Image 1" descr="/home/claude/icon_flask.png">    </p:cNvPr>
+          <p:cNvPicPr>
+            <a:picLocks noChangeAspect="1"/>
+          </p:cNvPicPr>
+          <p:nvPr/>
+        </p:nvPicPr>
+        <p:blipFill>
+          <a:blip r:embed="rId3"/>
+          <a:stretch>
+            <a:fillRect/>
+          </a:stretch>
+        </p:blipFill>
+        <p:spPr>
+          <a:xfrm>
+            <a:off x="7155180" y="3214116"/>
+            <a:ext cx="192024" cy="192024"/>
+          </a:xfrm>
+          <a:prstGeom prst="rect">
+            <a:avLst/>
+          </a:prstGeom>
+        </p:spPr>
+      </p:pic>
+      <p:sp>
+        <p:nvSpPr>
+          <p:cNvPr id="12" name="Text 7"/>
+          <p:cNvSpPr/>
+          <p:nvPr/>
+        </p:nvSpPr>
+        <p:spPr>
+          <a:xfrm>
+            <a:off x="7571232" y="3118104"/>
+            <a:ext cx="3749040" cy="384048"/>
+          </a:xfrm>
+          <a:prstGeom prst="rect">
+            <a:avLst/>
+          </a:prstGeom>
+          <a:noFill/>
+          <a:ln/>
+        </p:spPr>
+        <p:txBody>
+          <a:bodyPr wrap="square" lIns="0" tIns="0" rIns="0" bIns="0" rtlCol="0" anchor="ctr"/>
+          <a:lstStyle/>
+          <a:p>
+            <a:pPr indent="0" marL="0">
+              <a:buNone/>
+            </a:pPr>
+            <a:r>
+              <a:rPr lang="en-US" sz="1300" b="1" dirty="0">
+                <a:solidFill>
+                  <a:srgbClr val="1E2761"/>
+                </a:solidFill>
+                <a:latin typeface="Malgun Gothic" pitchFamily="34" charset="0"/>
+                <a:ea typeface="Malgun Gothic" pitchFamily="34" charset="-122"/>
+                <a:cs typeface="Malgun Gothic" pitchFamily="34" charset="-120"/>
+              </a:rPr>
+              <a:t>결과</a:t>
+            </a:r>
+            <a:endParaRPr lang="en-US" sz="1300" dirty="0"/>
+          </a:p>
+        </p:txBody>
+      </p:sp>
+      <p:sp>
+        <p:nvSpPr>
+          <p:cNvPr id="13" name="Text 8"/>
+          <p:cNvSpPr/>
+          <p:nvPr/>
+        </p:nvSpPr>
+        <p:spPr>
+          <a:xfrm>
+            <a:off x="7086600" y="3520440"/>
+            <a:ext cx="4251960" cy="777240"/>
           </a:xfrm>
           <a:prstGeom prst="rect">
             <a:avLst/>
@@ -4944,12 +4876,12 @@
           <a:p>
             <a:pPr indent="0" marL="0">
               <a:lnSpc>
-                <a:spcPct val="110000"/>
+                <a:spcPct val="112000"/>
               </a:lnSpc>
               <a:buNone/>
             </a:pPr>
             <a:r>
-              <a:rPr lang="en-US" sz="1200" dirty="0">
+              <a:rPr lang="en-US" sz="1100" dirty="0">
                 <a:solidFill>
                   <a:srgbClr val="1A1A1A"/>
                 </a:solidFill>
@@ -4957,130 +4889,30 @@
                 <a:ea typeface="Malgun Gothic" pitchFamily="34" charset="-122"/>
                 <a:cs typeface="Malgun Gothic" pitchFamily="34" charset="-120"/>
               </a:rPr>
-              <a:t>같은 값(연 22.9%)의 금리 변수 2개가 상반 방향으로 기여 — 트리 앙상블의 알려진 특성. 상관 변수 그룹 단위 SHAP 집계로 개선 예정</a:t>
-            </a:r>
-            <a:endParaRPr lang="en-US" sz="1200" dirty="0"/>
-          </a:p>
-        </p:txBody>
-      </p:sp>
-      <p:sp>
-        <p:nvSpPr>
-          <p:cNvPr id="13" name="Shape 11"/>
-          <p:cNvSpPr/>
-          <p:nvPr/>
-        </p:nvSpPr>
-        <p:spPr>
-          <a:xfrm>
-            <a:off x="640080" y="3758184"/>
-            <a:ext cx="3108960" cy="1005840"/>
+              <a:t>100% 사면에도 AUC 저하 0.0007 — 사실상 없음. 미래 불량자의 위험순위 백분위 98.3% → 97.1%</a:t>
+            </a:r>
+            <a:endParaRPr lang="en-US" sz="1100" dirty="0"/>
+          </a:p>
+        </p:txBody>
+      </p:sp>
+      <p:sp>
+        <p:nvSpPr>
+          <p:cNvPr id="14" name="Shape 9"/>
+          <p:cNvSpPr/>
+          <p:nvPr/>
+        </p:nvSpPr>
+        <p:spPr>
+          <a:xfrm>
+            <a:off x="6858000" y="4489704"/>
+            <a:ext cx="4709160" cy="1371600"/>
           </a:xfrm>
           <a:prstGeom prst="roundRect">
             <a:avLst>
-              <a:gd name="adj" fmla="val 9091"/>
+              <a:gd name="adj" fmla="val 6667"/>
             </a:avLst>
           </a:prstGeom>
           <a:solidFill>
-            <a:srgbClr val="FBEBEB"/>
-          </a:solidFill>
-          <a:ln/>
-        </p:spPr>
-      </p:sp>
-      <p:sp>
-        <p:nvSpPr>
-          <p:cNvPr id="14" name="Text 12"/>
-          <p:cNvSpPr/>
-          <p:nvPr/>
-        </p:nvSpPr>
-        <p:spPr>
-          <a:xfrm>
-            <a:off x="868680" y="3758184"/>
-            <a:ext cx="2743200" cy="1005840"/>
-          </a:xfrm>
-          <a:prstGeom prst="rect">
-            <a:avLst/>
-          </a:prstGeom>
-          <a:noFill/>
-          <a:ln/>
-        </p:spPr>
-        <p:txBody>
-          <a:bodyPr wrap="square" lIns="0" tIns="0" rIns="0" bIns="0" rtlCol="0" anchor="ctr"/>
-          <a:lstStyle/>
-          <a:p>
-            <a:pPr indent="0" marL="0">
-              <a:buNone/>
-            </a:pPr>
-            <a:r>
-              <a:rPr lang="en-US" sz="1350" b="1" dirty="0">
-                <a:solidFill>
-                  <a:srgbClr val="8E1F1F"/>
-                </a:solidFill>
-                <a:latin typeface="Malgun Gothic" pitchFamily="34" charset="0"/>
-                <a:ea typeface="Malgun Gothic" pitchFamily="34" charset="-122"/>
-                <a:cs typeface="Malgun Gothic" pitchFamily="34" charset="-120"/>
-              </a:rPr>
-              <a:t>정적 데모</a:t>
-            </a:r>
-            <a:endParaRPr lang="en-US" sz="1350" dirty="0"/>
-          </a:p>
-        </p:txBody>
-      </p:sp>
-      <p:sp>
-        <p:nvSpPr>
-          <p:cNvPr id="15" name="Text 13"/>
-          <p:cNvSpPr/>
-          <p:nvPr/>
-        </p:nvSpPr>
-        <p:spPr>
-          <a:xfrm>
-            <a:off x="3794760" y="3758184"/>
-            <a:ext cx="457200" cy="1005840"/>
-          </a:xfrm>
-          <a:prstGeom prst="rect">
-            <a:avLst/>
-          </a:prstGeom>
-          <a:noFill/>
-          <a:ln/>
-        </p:spPr>
-        <p:txBody>
-          <a:bodyPr wrap="square" lIns="0" tIns="0" rIns="0" bIns="0" rtlCol="0" anchor="ctr"/>
-          <a:lstStyle/>
-          <a:p>
-            <a:pPr algn="ctr" indent="0" marL="0">
-              <a:buNone/>
-            </a:pPr>
-            <a:r>
-              <a:rPr lang="en-US" sz="1600" b="1" dirty="0">
-                <a:solidFill>
-                  <a:srgbClr val="6B6B6B"/>
-                </a:solidFill>
-                <a:latin typeface="Malgun Gothic" pitchFamily="34" charset="0"/>
-                <a:ea typeface="Malgun Gothic" pitchFamily="34" charset="-122"/>
-                <a:cs typeface="Malgun Gothic" pitchFamily="34" charset="-120"/>
-              </a:rPr>
-              <a:t>→</a:t>
-            </a:r>
-            <a:endParaRPr lang="en-US" sz="1600" dirty="0"/>
-          </a:p>
-        </p:txBody>
-      </p:sp>
-      <p:sp>
-        <p:nvSpPr>
-          <p:cNvPr id="16" name="Shape 14"/>
-          <p:cNvSpPr/>
-          <p:nvPr/>
-        </p:nvSpPr>
-        <p:spPr>
-          <a:xfrm>
-            <a:off x="4297680" y="3758184"/>
-            <a:ext cx="7269480" cy="1005840"/>
-          </a:xfrm>
-          <a:prstGeom prst="roundRect">
-            <a:avLst>
-              <a:gd name="adj" fmla="val 9091"/>
-            </a:avLst>
-          </a:prstGeom>
-          <a:solidFill>
-            <a:srgbClr val="F5F7FA"/>
+            <a:srgbClr val="E8F0FB"/>
           </a:solidFill>
           <a:ln w="12700">
             <a:solidFill>
@@ -5092,14 +4924,97 @@
       </p:sp>
       <p:sp>
         <p:nvSpPr>
-          <p:cNvPr id="17" name="Text 15"/>
-          <p:cNvSpPr/>
-          <p:nvPr/>
-        </p:nvSpPr>
-        <p:spPr>
-          <a:xfrm>
-            <a:off x="4526280" y="3758184"/>
-            <a:ext cx="6858000" cy="1005840"/>
+          <p:cNvPr id="15" name="Shape 10"/>
+          <p:cNvSpPr/>
+          <p:nvPr/>
+        </p:nvSpPr>
+        <p:spPr>
+          <a:xfrm>
+            <a:off x="7059168" y="4654296"/>
+            <a:ext cx="384048" cy="384048"/>
+          </a:xfrm>
+          <a:prstGeom prst="ellipse">
+            <a:avLst/>
+          </a:prstGeom>
+          <a:solidFill>
+            <a:srgbClr val="1E2761"/>
+          </a:solidFill>
+          <a:ln/>
+        </p:spPr>
+      </p:sp>
+      <p:pic>
+        <p:nvPicPr>
+          <p:cNvPr id="16" name="Image 2" descr="/home/claude/icon_flask.png">    </p:cNvPr>
+          <p:cNvPicPr>
+            <a:picLocks noChangeAspect="1"/>
+          </p:cNvPicPr>
+          <p:nvPr/>
+        </p:nvPicPr>
+        <p:blipFill>
+          <a:blip r:embed="rId4"/>
+          <a:stretch>
+            <a:fillRect/>
+          </a:stretch>
+        </p:blipFill>
+        <p:spPr>
+          <a:xfrm>
+            <a:off x="7155180" y="4750308"/>
+            <a:ext cx="192024" cy="192024"/>
+          </a:xfrm>
+          <a:prstGeom prst="rect">
+            <a:avLst/>
+          </a:prstGeom>
+        </p:spPr>
+      </p:pic>
+      <p:sp>
+        <p:nvSpPr>
+          <p:cNvPr id="17" name="Text 11"/>
+          <p:cNvSpPr/>
+          <p:nvPr/>
+        </p:nvSpPr>
+        <p:spPr>
+          <a:xfrm>
+            <a:off x="7571232" y="4654296"/>
+            <a:ext cx="3749040" cy="384048"/>
+          </a:xfrm>
+          <a:prstGeom prst="rect">
+            <a:avLst/>
+          </a:prstGeom>
+          <a:noFill/>
+          <a:ln/>
+        </p:spPr>
+        <p:txBody>
+          <a:bodyPr wrap="square" lIns="0" tIns="0" rIns="0" bIns="0" rtlCol="0" anchor="ctr"/>
+          <a:lstStyle/>
+          <a:p>
+            <a:pPr indent="0" marL="0">
+              <a:buNone/>
+            </a:pPr>
+            <a:r>
+              <a:rPr lang="en-US" sz="1300" b="1" dirty="0">
+                <a:solidFill>
+                  <a:srgbClr val="1E2761"/>
+                </a:solidFill>
+                <a:latin typeface="Malgun Gothic" pitchFamily="34" charset="0"/>
+                <a:ea typeface="Malgun Gothic" pitchFamily="34" charset="-122"/>
+                <a:cs typeface="Malgun Gothic" pitchFamily="34" charset="-120"/>
+              </a:rPr>
+              <a:t>해석</a:t>
+            </a:r>
+            <a:endParaRPr lang="en-US" sz="1300" dirty="0"/>
+          </a:p>
+        </p:txBody>
+      </p:sp>
+      <p:sp>
+        <p:nvSpPr>
+          <p:cNvPr id="18" name="Text 12"/>
+          <p:cNvSpPr/>
+          <p:nvPr/>
+        </p:nvSpPr>
+        <p:spPr>
+          <a:xfrm>
+            <a:off x="7086600" y="5056632"/>
+            <a:ext cx="4251960" cy="777240"/>
           </a:xfrm>
           <a:prstGeom prst="rect">
             <a:avLst/>
@@ -5113,112 +5028,51 @@
           <a:p>
             <a:pPr indent="0" marL="0">
               <a:lnSpc>
-                <a:spcPct val="110000"/>
+                <a:spcPct val="112000"/>
               </a:lnSpc>
               <a:buNone/>
             </a:pPr>
             <a:r>
-              <a:rPr lang="en-US" sz="1200" dirty="0">
-                <a:solidFill>
-                  <a:srgbClr val="1A1A1A"/>
-                </a:solidFill>
-                <a:latin typeface="Malgun Gothic" pitchFamily="34" charset="0"/>
-                <a:ea typeface="Malgun Gothic" pitchFamily="34" charset="-122"/>
-                <a:cs typeface="Malgun Gothic" pitchFamily="34" charset="-120"/>
-              </a:rPr>
-              <a:t>시연은 사전 계산 결과의 재생(화면에 명시). 실시간 서비스화는 모형 서빙·키 관리 등 별도 MLOps 과제</a:t>
-            </a:r>
-            <a:endParaRPr lang="en-US" sz="1200" dirty="0"/>
-          </a:p>
-        </p:txBody>
-      </p:sp>
-      <p:sp>
-        <p:nvSpPr>
-          <p:cNvPr id="18" name="Shape 16"/>
-          <p:cNvSpPr/>
-          <p:nvPr/>
-        </p:nvSpPr>
-        <p:spPr>
-          <a:xfrm>
-            <a:off x="640080" y="4928616"/>
-            <a:ext cx="3108960" cy="1005840"/>
-          </a:xfrm>
-          <a:prstGeom prst="roundRect">
-            <a:avLst>
-              <a:gd name="adj" fmla="val 9091"/>
-            </a:avLst>
-          </a:prstGeom>
-          <a:solidFill>
-            <a:srgbClr val="FBEBEB"/>
-          </a:solidFill>
-          <a:ln/>
-        </p:spPr>
-      </p:sp>
-      <p:sp>
-        <p:nvSpPr>
-          <p:cNvPr id="19" name="Text 17"/>
-          <p:cNvSpPr/>
-          <p:nvPr/>
-        </p:nvSpPr>
-        <p:spPr>
-          <a:xfrm>
-            <a:off x="868680" y="4928616"/>
-            <a:ext cx="2743200" cy="1005840"/>
-          </a:xfrm>
-          <a:prstGeom prst="rect">
-            <a:avLst/>
-          </a:prstGeom>
-          <a:noFill/>
-          <a:ln/>
-        </p:spPr>
-        <p:txBody>
-          <a:bodyPr wrap="square" lIns="0" tIns="0" rIns="0" bIns="0" rtlCol="0" anchor="ctr"/>
-          <a:lstStyle/>
-          <a:p>
-            <a:pPr indent="0" marL="0">
-              <a:buNone/>
-            </a:pPr>
-            <a:r>
-              <a:rPr lang="en-US" sz="1350" b="1" dirty="0">
-                <a:solidFill>
-                  <a:srgbClr val="8E1F1F"/>
-                </a:solidFill>
-                <a:latin typeface="Malgun Gothic" pitchFamily="34" charset="0"/>
-                <a:ea typeface="Malgun Gothic" pitchFamily="34" charset="-122"/>
-                <a:cs typeface="Malgun Gothic" pitchFamily="34" charset="-120"/>
-              </a:rPr>
-              <a:t>잔액 변수 단위 미상</a:t>
-            </a:r>
-            <a:endParaRPr lang="en-US" sz="1350" dirty="0"/>
-          </a:p>
-        </p:txBody>
-      </p:sp>
-      <p:sp>
-        <p:nvSpPr>
-          <p:cNvPr id="20" name="Text 18"/>
-          <p:cNvSpPr/>
-          <p:nvPr/>
-        </p:nvSpPr>
-        <p:spPr>
-          <a:xfrm>
-            <a:off x="3794760" y="4928616"/>
-            <a:ext cx="457200" cy="1005840"/>
-          </a:xfrm>
-          <a:prstGeom prst="rect">
-            <a:avLst/>
-          </a:prstGeom>
-          <a:noFill/>
-          <a:ln/>
-        </p:spPr>
-        <p:txBody>
-          <a:bodyPr wrap="square" lIns="0" tIns="0" rIns="0" bIns="0" rtlCol="0" anchor="ctr"/>
-          <a:lstStyle/>
-          <a:p>
-            <a:pPr algn="ctr" indent="0" marL="0">
-              <a:buNone/>
-            </a:pPr>
-            <a:r>
-              <a:rPr lang="en-US" sz="1600" b="1" dirty="0">
+              <a:rPr lang="en-US" sz="1100" dirty="0">
+                <a:solidFill>
+                  <a:srgbClr val="1E2761"/>
+                </a:solidFill>
+                <a:latin typeface="Malgun Gothic" pitchFamily="34" charset="0"/>
+                <a:ea typeface="Malgun Gothic" pitchFamily="34" charset="-122"/>
+                <a:cs typeface="Malgun Gothic" pitchFamily="34" charset="-120"/>
+              </a:rPr>
+              <a:t>대리변수의 실증(8주차): 상관 높은 변수(대출 구성·금리·2/3금융권)로 우회 학습. 변수 삭제만으로는 모형의 행동을 바꿀 수 없다 → 결과를 사후적으로 설명하는 XAI가 필요한 이유</a:t>
+            </a:r>
+            <a:endParaRPr lang="en-US" sz="1100" dirty="0"/>
+          </a:p>
+        </p:txBody>
+      </p:sp>
+      <p:sp>
+        <p:nvSpPr>
+          <p:cNvPr id="19" name="Text 13"/>
+          <p:cNvSpPr/>
+          <p:nvPr/>
+        </p:nvSpPr>
+        <p:spPr>
+          <a:xfrm>
+            <a:off x="640080" y="5715000"/>
+            <a:ext cx="5852160" cy="320040"/>
+          </a:xfrm>
+          <a:prstGeom prst="rect">
+            <a:avLst/>
+          </a:prstGeom>
+          <a:noFill/>
+          <a:ln/>
+        </p:spPr>
+        <p:txBody>
+          <a:bodyPr wrap="square" lIns="0" tIns="0" rIns="0" bIns="0" rtlCol="0" anchor="ctr"/>
+          <a:lstStyle/>
+          <a:p>
+            <a:pPr indent="0" marL="0">
+              <a:buNone/>
+            </a:pPr>
+            <a:r>
+              <a:rPr lang="en-US" sz="1000" dirty="0">
                 <a:solidFill>
                   <a:srgbClr val="6B6B6B"/>
                 </a:solidFill>
@@ -5226,307 +5080,9 @@
                 <a:ea typeface="Malgun Gothic" pitchFamily="34" charset="-122"/>
                 <a:cs typeface="Malgun Gothic" pitchFamily="34" charset="-120"/>
               </a:rPr>
-              <a:t>→</a:t>
-            </a:r>
-            <a:endParaRPr lang="en-US" sz="1600" dirty="0"/>
-          </a:p>
-        </p:txBody>
-      </p:sp>
-      <p:sp>
-        <p:nvSpPr>
-          <p:cNvPr id="21" name="Shape 19"/>
-          <p:cNvSpPr/>
-          <p:nvPr/>
-        </p:nvSpPr>
-        <p:spPr>
-          <a:xfrm>
-            <a:off x="4297680" y="4928616"/>
-            <a:ext cx="7269480" cy="1005840"/>
-          </a:xfrm>
-          <a:prstGeom prst="roundRect">
-            <a:avLst>
-              <a:gd name="adj" fmla="val 9091"/>
-            </a:avLst>
-          </a:prstGeom>
-          <a:solidFill>
-            <a:srgbClr val="F5F7FA"/>
-          </a:solidFill>
-          <a:ln w="12700">
-            <a:solidFill>
-              <a:srgbClr val="DDDDDD"/>
-            </a:solidFill>
-            <a:prstDash val="solid"/>
-          </a:ln>
-        </p:spPr>
-      </p:sp>
-      <p:sp>
-        <p:nvSpPr>
-          <p:cNvPr id="22" name="Text 20"/>
-          <p:cNvSpPr/>
-          <p:nvPr/>
-        </p:nvSpPr>
-        <p:spPr>
-          <a:xfrm>
-            <a:off x="4526280" y="4928616"/>
-            <a:ext cx="6858000" cy="1005840"/>
-          </a:xfrm>
-          <a:prstGeom prst="rect">
-            <a:avLst/>
-          </a:prstGeom>
-          <a:noFill/>
-          <a:ln/>
-        </p:spPr>
-        <p:txBody>
-          <a:bodyPr wrap="square" lIns="0" tIns="0" rIns="0" bIns="0" rtlCol="0" anchor="ctr"/>
-          <a:lstStyle/>
-          <a:p>
-            <a:pPr indent="0" marL="0">
-              <a:lnSpc>
-                <a:spcPct val="110000"/>
-              </a:lnSpc>
-              <a:buNone/>
-            </a:pPr>
-            <a:r>
-              <a:rPr lang="en-US" sz="1200" dirty="0">
-                <a:solidFill>
-                  <a:srgbClr val="1A1A1A"/>
-                </a:solidFill>
-                <a:latin typeface="Malgun Gothic" pitchFamily="34" charset="0"/>
-                <a:ea typeface="Malgun Gothic" pitchFamily="34" charset="-122"/>
-                <a:cs typeface="Malgun Gothic" pitchFamily="34" charset="-120"/>
-              </a:rPr>
-              <a:t>데이터 정의서 부재로 무단위 인용 — 실서비스 전 단위 확정 필요. 금리는 분포 검증으로 단위 확정(%×1000)</a:t>
-            </a:r>
-            <a:endParaRPr lang="en-US" sz="1200" dirty="0"/>
-          </a:p>
-        </p:txBody>
-      </p:sp>
-    </p:spTree>
-  </p:cSld>
-  <p:clrMapOvr>
-    <a:masterClrMapping/>
-  </p:clrMapOvr>
-</p:sld>
-</file>
-
-<file path=ppt/slides/slide14.xml><?xml version="1.0" encoding="utf-8"?>
-<p:sld xmlns:a="http://schemas.openxmlformats.org/drawingml/2006/main" xmlns:r="http://schemas.openxmlformats.org/officeDocument/2006/relationships" xmlns:p="http://schemas.openxmlformats.org/presentationml/2006/main">
-  <p:cSld name="Slide 14">
-    <p:bg>
-      <p:bgPr>
-        <a:solidFill>
-          <a:srgbClr val="1E2761"/>
-        </a:solidFill>
-      </p:bgPr>
-    </p:bg>
-    <p:spTree>
-      <p:nvGrpSpPr>
-        <p:cNvPr id="1" name=""/>
-        <p:cNvGrpSpPr/>
-        <p:nvPr/>
-      </p:nvGrpSpPr>
-      <p:grpSpPr>
-        <a:xfrm>
-          <a:off x="0" y="0"/>
-          <a:ext cx="0" cy="0"/>
-          <a:chOff x="0" y="0"/>
-          <a:chExt cx="0" cy="0"/>
-        </a:xfrm>
-      </p:grpSpPr>
-      <p:sp>
-        <p:nvSpPr>
-          <p:cNvPr id="2" name="Text 0"/>
-          <p:cNvSpPr/>
-          <p:nvPr/>
-        </p:nvSpPr>
-        <p:spPr>
-          <a:xfrm>
-            <a:off x="822960" y="1463040"/>
-            <a:ext cx="10515600" cy="1280160"/>
-          </a:xfrm>
-          <a:prstGeom prst="rect">
-            <a:avLst/>
-          </a:prstGeom>
-          <a:noFill/>
-          <a:ln/>
-        </p:spPr>
-        <p:txBody>
-          <a:bodyPr wrap="square" lIns="0" tIns="0" rIns="0" bIns="0" rtlCol="0" anchor="ctr"/>
-          <a:lstStyle/>
-          <a:p>
-            <a:pPr indent="0" marL="0">
-              <a:buNone/>
-            </a:pPr>
-            <a:r>
-              <a:rPr lang="en-US" sz="3300" b="1" dirty="0">
-                <a:solidFill>
-                  <a:srgbClr val="FFFFFF"/>
-                </a:solidFill>
-                <a:latin typeface="Malgun Gothic" pitchFamily="34" charset="0"/>
-                <a:ea typeface="Malgun Gothic" pitchFamily="34" charset="-122"/>
-                <a:cs typeface="Malgun Gothic" pitchFamily="34" charset="-120"/>
-              </a:rPr>
-              <a:t>AI 도입의 이유는 성능만이 아니라, 신뢰입니다</a:t>
-            </a:r>
-            <a:endParaRPr lang="en-US" sz="3300" dirty="0"/>
-          </a:p>
-        </p:txBody>
-      </p:sp>
-      <p:sp>
-        <p:nvSpPr>
-          <p:cNvPr id="3" name="Text 1"/>
-          <p:cNvSpPr/>
-          <p:nvPr/>
-        </p:nvSpPr>
-        <p:spPr>
-          <a:xfrm>
-            <a:off x="868680" y="3017520"/>
-            <a:ext cx="10424160" cy="2011680"/>
-          </a:xfrm>
-          <a:prstGeom prst="rect">
-            <a:avLst/>
-          </a:prstGeom>
-          <a:noFill/>
-          <a:ln/>
-        </p:spPr>
-        <p:txBody>
-          <a:bodyPr wrap="square" lIns="0" tIns="0" rIns="0" bIns="0" rtlCol="0" anchor="ctr"/>
-          <a:lstStyle/>
-          <a:p>
-            <a:pPr indent="0" marL="0">
-              <a:lnSpc>
-                <a:spcPct val="160000"/>
-              </a:lnSpc>
-              <a:buNone/>
-            </a:pPr>
-            <a:r>
-              <a:rPr lang="en-US" sz="1700" dirty="0">
-                <a:solidFill>
-                  <a:srgbClr val="CADCFC"/>
-                </a:solidFill>
-                <a:latin typeface="Malgun Gothic" pitchFamily="34" charset="0"/>
-                <a:ea typeface="Malgun Gothic" pitchFamily="34" charset="-122"/>
-                <a:cs typeface="Malgun Gothic" pitchFamily="34" charset="-120"/>
-              </a:rPr>
-              <a:t>1   성능 — 평가 프로토콜을 바로잡아야 진짜 개선이 보인다 (Part 1 · 실습과제)
-</a:t>
-            </a:r>
-            <a:endParaRPr lang="en-US" sz="1700" dirty="0"/>
-          </a:p>
-          <a:p>
-            <a:pPr indent="0" marL="0">
-              <a:lnSpc>
-                <a:spcPct val="160000"/>
-              </a:lnSpc>
-              <a:buNone/>
-            </a:pPr>
-            <a:r>
-              <a:rPr lang="en-US" sz="1700" dirty="0">
-                <a:solidFill>
-                  <a:srgbClr val="CADCFC"/>
-                </a:solidFill>
-                <a:latin typeface="Malgun Gothic" pitchFamily="34" charset="0"/>
-                <a:ea typeface="Malgun Gothic" pitchFamily="34" charset="-122"/>
-                <a:cs typeface="Malgun Gothic" pitchFamily="34" charset="-120"/>
-              </a:rPr>
-              <a:t>2   신뢰 — 판단형은 평가, XAI는 근거, 생성형은 번역, 사람은 최종 판단 (Part 2 · 발표과제)
-</a:t>
-            </a:r>
-            <a:endParaRPr lang="en-US" sz="1700" dirty="0"/>
-          </a:p>
-          <a:p>
-            <a:pPr indent="0" marL="0">
-              <a:lnSpc>
-                <a:spcPct val="160000"/>
-              </a:lnSpc>
-              <a:buNone/>
-            </a:pPr>
-            <a:r>
-              <a:rPr lang="en-US" sz="1700" dirty="0">
-                <a:solidFill>
-                  <a:srgbClr val="CADCFC"/>
-                </a:solidFill>
-                <a:latin typeface="Malgun Gothic" pitchFamily="34" charset="0"/>
-                <a:ea typeface="Malgun Gothic" pitchFamily="34" charset="-122"/>
-                <a:cs typeface="Malgun Gothic" pitchFamily="34" charset="-120"/>
-              </a:rPr>
-              <a:t>3   기회 — 실습이 남긴 숙제(설명·공정성)를 풀면, 규제 대응이 곧 서비스가 된다 (9주차)</a:t>
-            </a:r>
-            <a:endParaRPr lang="en-US" sz="1700" dirty="0"/>
-          </a:p>
-        </p:txBody>
-      </p:sp>
-      <p:sp>
-        <p:nvSpPr>
-          <p:cNvPr id="4" name="Text 2"/>
-          <p:cNvSpPr/>
-          <p:nvPr/>
-        </p:nvSpPr>
-        <p:spPr>
-          <a:xfrm>
-            <a:off x="868680" y="5760720"/>
-            <a:ext cx="10424160" cy="411480"/>
-          </a:xfrm>
-          <a:prstGeom prst="rect">
-            <a:avLst/>
-          </a:prstGeom>
-          <a:noFill/>
-          <a:ln/>
-        </p:spPr>
-        <p:txBody>
-          <a:bodyPr wrap="square" lIns="0" tIns="0" rIns="0" bIns="0" rtlCol="0" anchor="ctr"/>
-          <a:lstStyle/>
-          <a:p>
-            <a:pPr indent="0" marL="0">
-              <a:buNone/>
-            </a:pPr>
-            <a:r>
-              <a:rPr lang="en-US" sz="1300" dirty="0">
-                <a:solidFill>
-                  <a:srgbClr val="CADCFC"/>
-                </a:solidFill>
-                <a:latin typeface="Malgun Gothic" pitchFamily="34" charset="0"/>
-                <a:ea typeface="Malgun Gothic" pitchFamily="34" charset="-122"/>
-                <a:cs typeface="Malgun Gothic" pitchFamily="34" charset="-120"/>
-              </a:rPr>
-              <a:t>감사합니다  ·  데모: </a:t>
-            </a:r>
-            <a:pPr indent="0" marL="0">
-              <a:buNone/>
-            </a:pPr>
-            <a:r>
-              <a:rPr lang="en-US" sz="1300" u="sng" dirty="0">
-                <a:solidFill>
-                  <a:srgbClr val="FFFFFF"/>
-                </a:solidFill>
-                <a:latin typeface="Malgun Gothic" pitchFamily="34" charset="0"/>
-                <a:ea typeface="Malgun Gothic" pitchFamily="34" charset="-122"/>
-                <a:cs typeface="Malgun Gothic" pitchFamily="34" charset="-120"/>
-                <a:hlinkClick r:id="rId1" invalidUrl="" action="" tgtFrame="" tooltip="라이브 데모 열기" history="1" highlightClick="0" endSnd="0">
-                  <a:extLst>
-                    <a:ext uri="{A12FA001-AC4F-418D-AE19-62706E023703}">
-                      <ahyp:hlinkClr xmlns:ahyp="http://schemas.microsoft.com/office/drawing/2018/hyperlinkcolor" val="tx"/>
-                    </a:ext>
-                  </a:extLst>
-                </a:hlinkClick>
-              </a:rPr>
-              <a:t>credit-explainer-demo.vercel.app</a:t>
-            </a:r>
-            <a:pPr indent="0" marL="0">
-              <a:buNone/>
-            </a:pPr>
-            <a:r>
-              <a:rPr lang="en-US" sz="1300" dirty="0">
-                <a:solidFill>
-                  <a:srgbClr val="CADCFC"/>
-                </a:solidFill>
-                <a:latin typeface="Malgun Gothic" pitchFamily="34" charset="0"/>
-                <a:ea typeface="Malgun Gothic" pitchFamily="34" charset="-122"/>
-                <a:cs typeface="Malgun Gothic" pitchFamily="34" charset="-120"/>
-              </a:rPr>
-              <a:t>  ·  GitHub: gwpark-dev/credit-explainer</a:t>
-            </a:r>
-            <a:endParaRPr lang="en-US" sz="1300" dirty="0"/>
+              <a:t>* Y축은 0.85~1.00 구간 확대 — 차이가 '없음'을 보이기 위한 축소 구간임</a:t>
+            </a:r>
+            <a:endParaRPr lang="en-US" sz="1000" dirty="0"/>
           </a:p>
         </p:txBody>
       </p:sp>
@@ -5587,7 +5143,7 @@
               <a:buNone/>
             </a:pPr>
             <a:r>
-              <a:rPr lang="en-US" sz="2200" b="1" dirty="0">
+              <a:rPr lang="en-US" sz="2600" b="1" dirty="0">
                 <a:solidFill>
                   <a:srgbClr val="1A1A1A"/>
                 </a:solidFill>
@@ -5595,42 +5151,26 @@
                 <a:ea typeface="Malgun Gothic" pitchFamily="34" charset="-122"/>
                 <a:cs typeface="Malgun Gothic" pitchFamily="34" charset="-120"/>
               </a:rPr>
-              <a:t>부록 A — 신용사면 시뮬레이션: 기록을 지워도 모형은 우회 학습한다</a:t>
-            </a:r>
-            <a:endParaRPr lang="en-US" sz="2200" dirty="0"/>
-          </a:p>
-        </p:txBody>
-      </p:sp>
-      <p:graphicFrame>
-        <p:nvGraphicFramePr>
-          <p:cNvPr id="3" name="Chart 0" descr=""/>
-          <p:cNvGraphicFramePr/>
-          <p:nvPr/>
-        </p:nvGraphicFramePr>
-        <p:xfrm>
-          <a:off x="640080" y="1371600"/>
-          <a:ext cx="5852160" cy="4206240"/>
-        </p:xfrm>
-        <a:graphic xmlns:a="http://schemas.openxmlformats.org/drawingml/2006/main">
-          <a:graphicData uri="http://schemas.openxmlformats.org/drawingml/2006/chart">
-            <c:chart xmlns:c="http://schemas.openxmlformats.org/drawingml/2006/chart" r:id="rId1"/>
-          </a:graphicData>
-        </a:graphic>
-      </p:graphicFrame>
-      <p:sp>
-        <p:nvSpPr>
-          <p:cNvPr id="4" name="Shape 1"/>
-          <p:cNvSpPr/>
-          <p:nvPr/>
-        </p:nvSpPr>
-        <p:spPr>
-          <a:xfrm>
-            <a:off x="6858000" y="1417320"/>
-            <a:ext cx="4709160" cy="1371600"/>
+              <a:t>부록 B — 예상 질문과 답</a:t>
+            </a:r>
+            <a:endParaRPr lang="en-US" sz="2600" dirty="0"/>
+          </a:p>
+        </p:txBody>
+      </p:sp>
+      <p:sp>
+        <p:nvSpPr>
+          <p:cNvPr id="3" name="Shape 1"/>
+          <p:cNvSpPr/>
+          <p:nvPr/>
+        </p:nvSpPr>
+        <p:spPr>
+          <a:xfrm>
+            <a:off x="640080" y="1417320"/>
+            <a:ext cx="10972800" cy="1389888"/>
           </a:xfrm>
           <a:prstGeom prst="roundRect">
             <a:avLst>
-              <a:gd name="adj" fmla="val 6667"/>
+              <a:gd name="adj" fmla="val 6579"/>
             </a:avLst>
           </a:prstGeom>
           <a:solidFill>
@@ -5646,74 +5186,30 @@
       </p:sp>
       <p:sp>
         <p:nvSpPr>
-          <p:cNvPr id="5" name="Shape 2"/>
-          <p:cNvSpPr/>
-          <p:nvPr/>
-        </p:nvSpPr>
-        <p:spPr>
-          <a:xfrm>
-            <a:off x="7059168" y="1581912"/>
-            <a:ext cx="384048" cy="384048"/>
-          </a:xfrm>
-          <a:prstGeom prst="ellipse">
-            <a:avLst/>
-          </a:prstGeom>
-          <a:solidFill>
-            <a:srgbClr val="1E2761"/>
-          </a:solidFill>
-          <a:ln/>
-        </p:spPr>
-      </p:sp>
-      <p:pic>
-        <p:nvPicPr>
-          <p:cNvPr id="6" name="Image 0" descr="/home/claude/icon_flask.png">    </p:cNvPr>
-          <p:cNvPicPr>
-            <a:picLocks noChangeAspect="1"/>
-          </p:cNvPicPr>
-          <p:nvPr/>
-        </p:nvPicPr>
-        <p:blipFill>
-          <a:blip r:embed="rId2"/>
-          <a:stretch>
-            <a:fillRect/>
-          </a:stretch>
-        </p:blipFill>
-        <p:spPr>
-          <a:xfrm>
-            <a:off x="7155180" y="1677924"/>
-            <a:ext cx="192024" cy="192024"/>
-          </a:xfrm>
-          <a:prstGeom prst="rect">
-            <a:avLst/>
-          </a:prstGeom>
-        </p:spPr>
-      </p:pic>
-      <p:sp>
-        <p:nvSpPr>
-          <p:cNvPr id="7" name="Text 3"/>
-          <p:cNvSpPr/>
-          <p:nvPr/>
-        </p:nvSpPr>
-        <p:spPr>
-          <a:xfrm>
-            <a:off x="7571232" y="1581912"/>
-            <a:ext cx="3749040" cy="384048"/>
-          </a:xfrm>
-          <a:prstGeom prst="rect">
-            <a:avLst/>
-          </a:prstGeom>
-          <a:noFill/>
-          <a:ln/>
-        </p:spPr>
-        <p:txBody>
-          <a:bodyPr wrap="square" lIns="0" tIns="0" rIns="0" bIns="0" rtlCol="0" anchor="ctr"/>
-          <a:lstStyle/>
-          <a:p>
-            <a:pPr indent="0" marL="0">
-              <a:buNone/>
-            </a:pPr>
-            <a:r>
-              <a:rPr lang="en-US" sz="1300" b="1" dirty="0">
+          <p:cNvPr id="4" name="Text 2"/>
+          <p:cNvSpPr/>
+          <p:nvPr/>
+        </p:nvSpPr>
+        <p:spPr>
+          <a:xfrm>
+            <a:off x="914400" y="1527048"/>
+            <a:ext cx="10424160" cy="411480"/>
+          </a:xfrm>
+          <a:prstGeom prst="rect">
+            <a:avLst/>
+          </a:prstGeom>
+          <a:noFill/>
+          <a:ln/>
+        </p:spPr>
+        <p:txBody>
+          <a:bodyPr wrap="square" lIns="0" tIns="0" rIns="0" bIns="0" rtlCol="0" anchor="ctr"/>
+          <a:lstStyle/>
+          <a:p>
+            <a:pPr indent="0" marL="0">
+              <a:buNone/>
+            </a:pPr>
+            <a:r>
+              <a:rPr lang="en-US" sz="1400" b="1" dirty="0">
                 <a:solidFill>
                   <a:srgbClr val="1E2761"/>
                 </a:solidFill>
@@ -5721,22 +5217,22 @@
                 <a:ea typeface="Malgun Gothic" pitchFamily="34" charset="-122"/>
                 <a:cs typeface="Malgun Gothic" pitchFamily="34" charset="-120"/>
               </a:rPr>
-              <a:t>설계</a:t>
-            </a:r>
-            <a:endParaRPr lang="en-US" sz="1300" dirty="0"/>
-          </a:p>
-        </p:txBody>
-      </p:sp>
-      <p:sp>
-        <p:nvSpPr>
-          <p:cNvPr id="8" name="Text 4"/>
-          <p:cNvSpPr/>
-          <p:nvPr/>
-        </p:nvSpPr>
-        <p:spPr>
-          <a:xfrm>
-            <a:off x="7086600" y="1984248"/>
-            <a:ext cx="4251960" cy="777240"/>
+              <a:t>Q.  같은 22.9% 금리 변수 2개가 왜 반대 방향인가?</a:t>
+            </a:r>
+            <a:endParaRPr lang="en-US" sz="1400" dirty="0"/>
+          </a:p>
+        </p:txBody>
+      </p:sp>
+      <p:sp>
+        <p:nvSpPr>
+          <p:cNvPr id="5" name="Text 3"/>
+          <p:cNvSpPr/>
+          <p:nvPr/>
+        </p:nvSpPr>
+        <p:spPr>
+          <a:xfrm>
+            <a:off x="914400" y="1947672"/>
+            <a:ext cx="10424160" cy="822960"/>
           </a:xfrm>
           <a:prstGeom prst="rect">
             <a:avLst/>
@@ -5755,7 +5251,7 @@
               <a:buNone/>
             </a:pPr>
             <a:r>
-              <a:rPr lang="en-US" sz="1100" dirty="0">
+              <a:rPr lang="en-US" sz="1250" dirty="0">
                 <a:solidFill>
                   <a:srgbClr val="1A1A1A"/>
                 </a:solidFill>
@@ -5763,26 +5259,26 @@
                 <a:ea typeface="Malgun Gothic" pitchFamily="34" charset="-122"/>
                 <a:cs typeface="Malgun Gothic" pitchFamily="34" charset="-120"/>
               </a:rPr>
-              <a:t>현재연체자 2,729명(향후 연체율 3.08%, 정상군의 16배)의 연체기록 4개 변수를 삭제 후 재학습·재평가 — 9주차 토의의 실증</a:t>
-            </a:r>
-            <a:endParaRPr lang="en-US" sz="1100" dirty="0"/>
-          </a:p>
-        </p:txBody>
-      </p:sp>
-      <p:sp>
-        <p:nvSpPr>
-          <p:cNvPr id="9" name="Shape 5"/>
-          <p:cNvSpPr/>
-          <p:nvPr/>
-        </p:nvSpPr>
-        <p:spPr>
-          <a:xfrm>
-            <a:off x="6858000" y="2953512"/>
-            <a:ext cx="4709160" cy="1371600"/>
+              <a:t>A.  상관 높은 변수들 사이에서 SHAP 기여도가 분산되는 트리 앙상블의 알려진 특성. 한계로 공개했고, 상관 변수 그룹 단위 집계(그룹 SHAP)가 개선 방향.</a:t>
+            </a:r>
+            <a:endParaRPr lang="en-US" sz="1250" dirty="0"/>
+          </a:p>
+        </p:txBody>
+      </p:sp>
+      <p:sp>
+        <p:nvSpPr>
+          <p:cNvPr id="6" name="Shape 4"/>
+          <p:cNvSpPr/>
+          <p:nvPr/>
+        </p:nvSpPr>
+        <p:spPr>
+          <a:xfrm>
+            <a:off x="640080" y="2990088"/>
+            <a:ext cx="10972800" cy="1389888"/>
           </a:xfrm>
           <a:prstGeom prst="roundRect">
             <a:avLst>
-              <a:gd name="adj" fmla="val 6667"/>
+              <a:gd name="adj" fmla="val 6579"/>
             </a:avLst>
           </a:prstGeom>
           <a:solidFill>
@@ -5798,74 +5294,30 @@
       </p:sp>
       <p:sp>
         <p:nvSpPr>
-          <p:cNvPr id="10" name="Shape 6"/>
-          <p:cNvSpPr/>
-          <p:nvPr/>
-        </p:nvSpPr>
-        <p:spPr>
-          <a:xfrm>
-            <a:off x="7059168" y="3118104"/>
-            <a:ext cx="384048" cy="384048"/>
-          </a:xfrm>
-          <a:prstGeom prst="ellipse">
-            <a:avLst/>
-          </a:prstGeom>
-          <a:solidFill>
-            <a:srgbClr val="1E2761"/>
-          </a:solidFill>
-          <a:ln/>
-        </p:spPr>
-      </p:sp>
-      <p:pic>
-        <p:nvPicPr>
-          <p:cNvPr id="11" name="Image 1" descr="/home/claude/icon_flask.png">    </p:cNvPr>
-          <p:cNvPicPr>
-            <a:picLocks noChangeAspect="1"/>
-          </p:cNvPicPr>
-          <p:nvPr/>
-        </p:nvPicPr>
-        <p:blipFill>
-          <a:blip r:embed="rId3"/>
-          <a:stretch>
-            <a:fillRect/>
-          </a:stretch>
-        </p:blipFill>
-        <p:spPr>
-          <a:xfrm>
-            <a:off x="7155180" y="3214116"/>
-            <a:ext cx="192024" cy="192024"/>
-          </a:xfrm>
-          <a:prstGeom prst="rect">
-            <a:avLst/>
-          </a:prstGeom>
-        </p:spPr>
-      </p:pic>
-      <p:sp>
-        <p:nvSpPr>
-          <p:cNvPr id="12" name="Text 7"/>
-          <p:cNvSpPr/>
-          <p:nvPr/>
-        </p:nvSpPr>
-        <p:spPr>
-          <a:xfrm>
-            <a:off x="7571232" y="3118104"/>
-            <a:ext cx="3749040" cy="384048"/>
-          </a:xfrm>
-          <a:prstGeom prst="rect">
-            <a:avLst/>
-          </a:prstGeom>
-          <a:noFill/>
-          <a:ln/>
-        </p:spPr>
-        <p:txBody>
-          <a:bodyPr wrap="square" lIns="0" tIns="0" rIns="0" bIns="0" rtlCol="0" anchor="ctr"/>
-          <a:lstStyle/>
-          <a:p>
-            <a:pPr indent="0" marL="0">
-              <a:buNone/>
-            </a:pPr>
-            <a:r>
-              <a:rPr lang="en-US" sz="1300" b="1" dirty="0">
+          <p:cNvPr id="7" name="Text 5"/>
+          <p:cNvSpPr/>
+          <p:nvPr/>
+        </p:nvSpPr>
+        <p:spPr>
+          <a:xfrm>
+            <a:off x="914400" y="3099816"/>
+            <a:ext cx="10424160" cy="411480"/>
+          </a:xfrm>
+          <a:prstGeom prst="rect">
+            <a:avLst/>
+          </a:prstGeom>
+          <a:noFill/>
+          <a:ln/>
+        </p:spPr>
+        <p:txBody>
+          <a:bodyPr wrap="square" lIns="0" tIns="0" rIns="0" bIns="0" rtlCol="0" anchor="ctr"/>
+          <a:lstStyle/>
+          <a:p>
+            <a:pPr indent="0" marL="0">
+              <a:buNone/>
+            </a:pPr>
+            <a:r>
+              <a:rPr lang="en-US" sz="1400" b="1" dirty="0">
                 <a:solidFill>
                   <a:srgbClr val="1E2761"/>
                 </a:solidFill>
@@ -5873,22 +5325,22 @@
                 <a:ea typeface="Malgun Gothic" pitchFamily="34" charset="-122"/>
                 <a:cs typeface="Malgun Gothic" pitchFamily="34" charset="-120"/>
               </a:rPr>
-              <a:t>결과</a:t>
-            </a:r>
-            <a:endParaRPr lang="en-US" sz="1300" dirty="0"/>
-          </a:p>
-        </p:txBody>
-      </p:sp>
-      <p:sp>
-        <p:nvSpPr>
-          <p:cNvPr id="13" name="Text 8"/>
-          <p:cNvSpPr/>
-          <p:nvPr/>
-        </p:nvSpPr>
-        <p:spPr>
-          <a:xfrm>
-            <a:off x="7086600" y="3520440"/>
-            <a:ext cx="4251960" cy="777240"/>
+              <a:t>Q.  NICE·KCB도 이미 SHAP을 쓰는데 차별점은?</a:t>
+            </a:r>
+            <a:endParaRPr lang="en-US" sz="1400" dirty="0"/>
+          </a:p>
+        </p:txBody>
+      </p:sp>
+      <p:sp>
+        <p:nvSpPr>
+          <p:cNvPr id="8" name="Text 6"/>
+          <p:cNvSpPr/>
+          <p:nvPr/>
+        </p:nvSpPr>
+        <p:spPr>
+          <a:xfrm>
+            <a:off x="914400" y="3520440"/>
+            <a:ext cx="10424160" cy="822960"/>
           </a:xfrm>
           <a:prstGeom prst="rect">
             <a:avLst/>
@@ -5907,7 +5359,7 @@
               <a:buNone/>
             </a:pPr>
             <a:r>
-              <a:rPr lang="en-US" sz="1100" dirty="0">
+              <a:rPr lang="en-US" sz="1250" dirty="0">
                 <a:solidFill>
                   <a:srgbClr val="1A1A1A"/>
                 </a:solidFill>
@@ -5915,485 +5367,7 @@
                 <a:ea typeface="Malgun Gothic" pitchFamily="34" charset="-122"/>
                 <a:cs typeface="Malgun Gothic" pitchFamily="34" charset="-120"/>
               </a:rPr>
-              <a:t>100% 사면에도 AUC 저하 0.0007 — 사실상 없음. 미래 불량자의 위험순위 백분위 98.3% → 97.1%</a:t>
-            </a:r>
-            <a:endParaRPr lang="en-US" sz="1100" dirty="0"/>
-          </a:p>
-        </p:txBody>
-      </p:sp>
-      <p:sp>
-        <p:nvSpPr>
-          <p:cNvPr id="14" name="Shape 9"/>
-          <p:cNvSpPr/>
-          <p:nvPr/>
-        </p:nvSpPr>
-        <p:spPr>
-          <a:xfrm>
-            <a:off x="6858000" y="4489704"/>
-            <a:ext cx="4709160" cy="1371600"/>
-          </a:xfrm>
-          <a:prstGeom prst="roundRect">
-            <a:avLst>
-              <a:gd name="adj" fmla="val 6667"/>
-            </a:avLst>
-          </a:prstGeom>
-          <a:solidFill>
-            <a:srgbClr val="E8F0FB"/>
-          </a:solidFill>
-          <a:ln w="12700">
-            <a:solidFill>
-              <a:srgbClr val="DDDDDD"/>
-            </a:solidFill>
-            <a:prstDash val="solid"/>
-          </a:ln>
-        </p:spPr>
-      </p:sp>
-      <p:sp>
-        <p:nvSpPr>
-          <p:cNvPr id="15" name="Shape 10"/>
-          <p:cNvSpPr/>
-          <p:nvPr/>
-        </p:nvSpPr>
-        <p:spPr>
-          <a:xfrm>
-            <a:off x="7059168" y="4654296"/>
-            <a:ext cx="384048" cy="384048"/>
-          </a:xfrm>
-          <a:prstGeom prst="ellipse">
-            <a:avLst/>
-          </a:prstGeom>
-          <a:solidFill>
-            <a:srgbClr val="1E2761"/>
-          </a:solidFill>
-          <a:ln/>
-        </p:spPr>
-      </p:sp>
-      <p:pic>
-        <p:nvPicPr>
-          <p:cNvPr id="16" name="Image 2" descr="/home/claude/icon_flask.png">    </p:cNvPr>
-          <p:cNvPicPr>
-            <a:picLocks noChangeAspect="1"/>
-          </p:cNvPicPr>
-          <p:nvPr/>
-        </p:nvPicPr>
-        <p:blipFill>
-          <a:blip r:embed="rId4"/>
-          <a:stretch>
-            <a:fillRect/>
-          </a:stretch>
-        </p:blipFill>
-        <p:spPr>
-          <a:xfrm>
-            <a:off x="7155180" y="4750308"/>
-            <a:ext cx="192024" cy="192024"/>
-          </a:xfrm>
-          <a:prstGeom prst="rect">
-            <a:avLst/>
-          </a:prstGeom>
-        </p:spPr>
-      </p:pic>
-      <p:sp>
-        <p:nvSpPr>
-          <p:cNvPr id="17" name="Text 11"/>
-          <p:cNvSpPr/>
-          <p:nvPr/>
-        </p:nvSpPr>
-        <p:spPr>
-          <a:xfrm>
-            <a:off x="7571232" y="4654296"/>
-            <a:ext cx="3749040" cy="384048"/>
-          </a:xfrm>
-          <a:prstGeom prst="rect">
-            <a:avLst/>
-          </a:prstGeom>
-          <a:noFill/>
-          <a:ln/>
-        </p:spPr>
-        <p:txBody>
-          <a:bodyPr wrap="square" lIns="0" tIns="0" rIns="0" bIns="0" rtlCol="0" anchor="ctr"/>
-          <a:lstStyle/>
-          <a:p>
-            <a:pPr indent="0" marL="0">
-              <a:buNone/>
-            </a:pPr>
-            <a:r>
-              <a:rPr lang="en-US" sz="1300" b="1" dirty="0">
-                <a:solidFill>
-                  <a:srgbClr val="1E2761"/>
-                </a:solidFill>
-                <a:latin typeface="Malgun Gothic" pitchFamily="34" charset="0"/>
-                <a:ea typeface="Malgun Gothic" pitchFamily="34" charset="-122"/>
-                <a:cs typeface="Malgun Gothic" pitchFamily="34" charset="-120"/>
-              </a:rPr>
-              <a:t>해석</a:t>
-            </a:r>
-            <a:endParaRPr lang="en-US" sz="1300" dirty="0"/>
-          </a:p>
-        </p:txBody>
-      </p:sp>
-      <p:sp>
-        <p:nvSpPr>
-          <p:cNvPr id="18" name="Text 12"/>
-          <p:cNvSpPr/>
-          <p:nvPr/>
-        </p:nvSpPr>
-        <p:spPr>
-          <a:xfrm>
-            <a:off x="7086600" y="5056632"/>
-            <a:ext cx="4251960" cy="777240"/>
-          </a:xfrm>
-          <a:prstGeom prst="rect">
-            <a:avLst/>
-          </a:prstGeom>
-          <a:noFill/>
-          <a:ln/>
-        </p:spPr>
-        <p:txBody>
-          <a:bodyPr wrap="square" lIns="0" tIns="0" rIns="0" bIns="0" rtlCol="0" anchor="ctr"/>
-          <a:lstStyle/>
-          <a:p>
-            <a:pPr indent="0" marL="0">
-              <a:lnSpc>
-                <a:spcPct val="112000"/>
-              </a:lnSpc>
-              <a:buNone/>
-            </a:pPr>
-            <a:r>
-              <a:rPr lang="en-US" sz="1100" dirty="0">
-                <a:solidFill>
-                  <a:srgbClr val="1E2761"/>
-                </a:solidFill>
-                <a:latin typeface="Malgun Gothic" pitchFamily="34" charset="0"/>
-                <a:ea typeface="Malgun Gothic" pitchFamily="34" charset="-122"/>
-                <a:cs typeface="Malgun Gothic" pitchFamily="34" charset="-120"/>
-              </a:rPr>
-              <a:t>대리변수의 실증(8주차): 상관 높은 변수(대출 구성·금리·2/3금융권)로 우회 학습. 변수 삭제만으로는 모형의 행동을 바꿀 수 없다 → 사후 설명(XAI)과 그룹별 감사가 필요</a:t>
-            </a:r>
-            <a:endParaRPr lang="en-US" sz="1100" dirty="0"/>
-          </a:p>
-        </p:txBody>
-      </p:sp>
-      <p:sp>
-        <p:nvSpPr>
-          <p:cNvPr id="19" name="Text 13"/>
-          <p:cNvSpPr/>
-          <p:nvPr/>
-        </p:nvSpPr>
-        <p:spPr>
-          <a:xfrm>
-            <a:off x="640080" y="5715000"/>
-            <a:ext cx="5852160" cy="320040"/>
-          </a:xfrm>
-          <a:prstGeom prst="rect">
-            <a:avLst/>
-          </a:prstGeom>
-          <a:noFill/>
-          <a:ln/>
-        </p:spPr>
-        <p:txBody>
-          <a:bodyPr wrap="square" lIns="0" tIns="0" rIns="0" bIns="0" rtlCol="0" anchor="ctr"/>
-          <a:lstStyle/>
-          <a:p>
-            <a:pPr indent="0" marL="0">
-              <a:buNone/>
-            </a:pPr>
-            <a:r>
-              <a:rPr lang="en-US" sz="1000" dirty="0">
-                <a:solidFill>
-                  <a:srgbClr val="6B6B6B"/>
-                </a:solidFill>
-                <a:latin typeface="Malgun Gothic" pitchFamily="34" charset="0"/>
-                <a:ea typeface="Malgun Gothic" pitchFamily="34" charset="-122"/>
-                <a:cs typeface="Malgun Gothic" pitchFamily="34" charset="-120"/>
-              </a:rPr>
-              <a:t>* Y축은 0.85~1.00 구간 확대 — 차이가 '없음'을 보이기 위한 축소 구간임</a:t>
-            </a:r>
-            <a:endParaRPr lang="en-US" sz="1000" dirty="0"/>
-          </a:p>
-        </p:txBody>
-      </p:sp>
-    </p:spTree>
-  </p:cSld>
-  <p:clrMapOvr>
-    <a:masterClrMapping/>
-  </p:clrMapOvr>
-</p:sld>
-</file>
-
-<file path=ppt/slides/slide16.xml><?xml version="1.0" encoding="utf-8"?>
-<p:sld xmlns:a="http://schemas.openxmlformats.org/drawingml/2006/main" xmlns:r="http://schemas.openxmlformats.org/officeDocument/2006/relationships" xmlns:p="http://schemas.openxmlformats.org/presentationml/2006/main">
-  <p:cSld name="Slide 16">
-    <p:bg>
-      <p:bgPr>
-        <a:solidFill>
-          <a:srgbClr val="FFFFFF"/>
-        </a:solidFill>
-      </p:bgPr>
-    </p:bg>
-    <p:spTree>
-      <p:nvGrpSpPr>
-        <p:cNvPr id="1" name=""/>
-        <p:cNvGrpSpPr/>
-        <p:nvPr/>
-      </p:nvGrpSpPr>
-      <p:grpSpPr>
-        <a:xfrm>
-          <a:off x="0" y="0"/>
-          <a:ext cx="0" cy="0"/>
-          <a:chOff x="0" y="0"/>
-          <a:chExt cx="0" cy="0"/>
-        </a:xfrm>
-      </p:grpSpPr>
-      <p:sp>
-        <p:nvSpPr>
-          <p:cNvPr id="2" name="Text 0"/>
-          <p:cNvSpPr/>
-          <p:nvPr/>
-        </p:nvSpPr>
-        <p:spPr>
-          <a:xfrm>
-            <a:off x="640080" y="457200"/>
-            <a:ext cx="10972800" cy="594360"/>
-          </a:xfrm>
-          <a:prstGeom prst="rect">
-            <a:avLst/>
-          </a:prstGeom>
-          <a:noFill/>
-          <a:ln/>
-        </p:spPr>
-        <p:txBody>
-          <a:bodyPr wrap="square" lIns="0" tIns="0" rIns="0" bIns="0" rtlCol="0" anchor="ctr"/>
-          <a:lstStyle/>
-          <a:p>
-            <a:pPr indent="0" marL="0">
-              <a:buNone/>
-            </a:pPr>
-            <a:r>
-              <a:rPr lang="en-US" sz="2600" b="1" dirty="0">
-                <a:solidFill>
-                  <a:srgbClr val="1A1A1A"/>
-                </a:solidFill>
-                <a:latin typeface="Malgun Gothic" pitchFamily="34" charset="0"/>
-                <a:ea typeface="Malgun Gothic" pitchFamily="34" charset="-122"/>
-                <a:cs typeface="Malgun Gothic" pitchFamily="34" charset="-120"/>
-              </a:rPr>
-              <a:t>부록 B — 예상 질문과 답</a:t>
-            </a:r>
-            <a:endParaRPr lang="en-US" sz="2600" dirty="0"/>
-          </a:p>
-        </p:txBody>
-      </p:sp>
-      <p:sp>
-        <p:nvSpPr>
-          <p:cNvPr id="3" name="Shape 1"/>
-          <p:cNvSpPr/>
-          <p:nvPr/>
-        </p:nvSpPr>
-        <p:spPr>
-          <a:xfrm>
-            <a:off x="640080" y="1417320"/>
-            <a:ext cx="10972800" cy="1389888"/>
-          </a:xfrm>
-          <a:prstGeom prst="roundRect">
-            <a:avLst>
-              <a:gd name="adj" fmla="val 6579"/>
-            </a:avLst>
-          </a:prstGeom>
-          <a:solidFill>
-            <a:srgbClr val="F5F7FA"/>
-          </a:solidFill>
-          <a:ln w="12700">
-            <a:solidFill>
-              <a:srgbClr val="DDDDDD"/>
-            </a:solidFill>
-            <a:prstDash val="solid"/>
-          </a:ln>
-        </p:spPr>
-      </p:sp>
-      <p:sp>
-        <p:nvSpPr>
-          <p:cNvPr id="4" name="Text 2"/>
-          <p:cNvSpPr/>
-          <p:nvPr/>
-        </p:nvSpPr>
-        <p:spPr>
-          <a:xfrm>
-            <a:off x="914400" y="1527048"/>
-            <a:ext cx="10424160" cy="411480"/>
-          </a:xfrm>
-          <a:prstGeom prst="rect">
-            <a:avLst/>
-          </a:prstGeom>
-          <a:noFill/>
-          <a:ln/>
-        </p:spPr>
-        <p:txBody>
-          <a:bodyPr wrap="square" lIns="0" tIns="0" rIns="0" bIns="0" rtlCol="0" anchor="ctr"/>
-          <a:lstStyle/>
-          <a:p>
-            <a:pPr indent="0" marL="0">
-              <a:buNone/>
-            </a:pPr>
-            <a:r>
-              <a:rPr lang="en-US" sz="1400" b="1" dirty="0">
-                <a:solidFill>
-                  <a:srgbClr val="1E2761"/>
-                </a:solidFill>
-                <a:latin typeface="Malgun Gothic" pitchFamily="34" charset="0"/>
-                <a:ea typeface="Malgun Gothic" pitchFamily="34" charset="-122"/>
-                <a:cs typeface="Malgun Gothic" pitchFamily="34" charset="-120"/>
-              </a:rPr>
-              <a:t>Q.  같은 22.9% 금리 변수 2개가 왜 반대 방향인가?</a:t>
-            </a:r>
-            <a:endParaRPr lang="en-US" sz="1400" dirty="0"/>
-          </a:p>
-        </p:txBody>
-      </p:sp>
-      <p:sp>
-        <p:nvSpPr>
-          <p:cNvPr id="5" name="Text 3"/>
-          <p:cNvSpPr/>
-          <p:nvPr/>
-        </p:nvSpPr>
-        <p:spPr>
-          <a:xfrm>
-            <a:off x="914400" y="1947672"/>
-            <a:ext cx="10424160" cy="822960"/>
-          </a:xfrm>
-          <a:prstGeom prst="rect">
-            <a:avLst/>
-          </a:prstGeom>
-          <a:noFill/>
-          <a:ln/>
-        </p:spPr>
-        <p:txBody>
-          <a:bodyPr wrap="square" lIns="0" tIns="0" rIns="0" bIns="0" rtlCol="0" anchor="ctr"/>
-          <a:lstStyle/>
-          <a:p>
-            <a:pPr indent="0" marL="0">
-              <a:lnSpc>
-                <a:spcPct val="112000"/>
-              </a:lnSpc>
-              <a:buNone/>
-            </a:pPr>
-            <a:r>
-              <a:rPr lang="en-US" sz="1250" dirty="0">
-                <a:solidFill>
-                  <a:srgbClr val="1A1A1A"/>
-                </a:solidFill>
-                <a:latin typeface="Malgun Gothic" pitchFamily="34" charset="0"/>
-                <a:ea typeface="Malgun Gothic" pitchFamily="34" charset="-122"/>
-                <a:cs typeface="Malgun Gothic" pitchFamily="34" charset="-120"/>
-              </a:rPr>
-              <a:t>A.  상관 높은 변수들 사이에서 SHAP 기여도가 분산되는 트리 앙상블의 알려진 특성. 한계로 공개했고, 상관 변수 그룹 단위 집계(그룹 SHAP)가 개선 방향.</a:t>
-            </a:r>
-            <a:endParaRPr lang="en-US" sz="1250" dirty="0"/>
-          </a:p>
-        </p:txBody>
-      </p:sp>
-      <p:sp>
-        <p:nvSpPr>
-          <p:cNvPr id="6" name="Shape 4"/>
-          <p:cNvSpPr/>
-          <p:nvPr/>
-        </p:nvSpPr>
-        <p:spPr>
-          <a:xfrm>
-            <a:off x="640080" y="2990088"/>
-            <a:ext cx="10972800" cy="1389888"/>
-          </a:xfrm>
-          <a:prstGeom prst="roundRect">
-            <a:avLst>
-              <a:gd name="adj" fmla="val 6579"/>
-            </a:avLst>
-          </a:prstGeom>
-          <a:solidFill>
-            <a:srgbClr val="F5F7FA"/>
-          </a:solidFill>
-          <a:ln w="12700">
-            <a:solidFill>
-              <a:srgbClr val="DDDDDD"/>
-            </a:solidFill>
-            <a:prstDash val="solid"/>
-          </a:ln>
-        </p:spPr>
-      </p:sp>
-      <p:sp>
-        <p:nvSpPr>
-          <p:cNvPr id="7" name="Text 5"/>
-          <p:cNvSpPr/>
-          <p:nvPr/>
-        </p:nvSpPr>
-        <p:spPr>
-          <a:xfrm>
-            <a:off x="914400" y="3099816"/>
-            <a:ext cx="10424160" cy="411480"/>
-          </a:xfrm>
-          <a:prstGeom prst="rect">
-            <a:avLst/>
-          </a:prstGeom>
-          <a:noFill/>
-          <a:ln/>
-        </p:spPr>
-        <p:txBody>
-          <a:bodyPr wrap="square" lIns="0" tIns="0" rIns="0" bIns="0" rtlCol="0" anchor="ctr"/>
-          <a:lstStyle/>
-          <a:p>
-            <a:pPr indent="0" marL="0">
-              <a:buNone/>
-            </a:pPr>
-            <a:r>
-              <a:rPr lang="en-US" sz="1400" b="1" dirty="0">
-                <a:solidFill>
-                  <a:srgbClr val="1E2761"/>
-                </a:solidFill>
-                <a:latin typeface="Malgun Gothic" pitchFamily="34" charset="0"/>
-                <a:ea typeface="Malgun Gothic" pitchFamily="34" charset="-122"/>
-                <a:cs typeface="Malgun Gothic" pitchFamily="34" charset="-120"/>
-              </a:rPr>
-              <a:t>Q.  NICE·KCB도 이미 SHAP을 쓰는데 차별점은?</a:t>
-            </a:r>
-            <a:endParaRPr lang="en-US" sz="1400" dirty="0"/>
-          </a:p>
-        </p:txBody>
-      </p:sp>
-      <p:sp>
-        <p:nvSpPr>
-          <p:cNvPr id="8" name="Text 6"/>
-          <p:cNvSpPr/>
-          <p:nvPr/>
-        </p:nvSpPr>
-        <p:spPr>
-          <a:xfrm>
-            <a:off x="914400" y="3520440"/>
-            <a:ext cx="10424160" cy="822960"/>
-          </a:xfrm>
-          <a:prstGeom prst="rect">
-            <a:avLst/>
-          </a:prstGeom>
-          <a:noFill/>
-          <a:ln/>
-        </p:spPr>
-        <p:txBody>
-          <a:bodyPr wrap="square" lIns="0" tIns="0" rIns="0" bIns="0" rtlCol="0" anchor="ctr"/>
-          <a:lstStyle/>
-          <a:p>
-            <a:pPr indent="0" marL="0">
-              <a:lnSpc>
-                <a:spcPct val="112000"/>
-              </a:lnSpc>
-              <a:buNone/>
-            </a:pPr>
-            <a:r>
-              <a:rPr lang="en-US" sz="1250" dirty="0">
-                <a:solidFill>
-                  <a:srgbClr val="1A1A1A"/>
-                </a:solidFill>
-                <a:latin typeface="Malgun Gothic" pitchFamily="34" charset="0"/>
-                <a:ea typeface="Malgun Gothic" pitchFamily="34" charset="-122"/>
-                <a:cs typeface="Malgun Gothic" pitchFamily="34" charset="-120"/>
-              </a:rPr>
-              <a:t>A.  현행은 내부 검증·부정사유 코드 생성용. 본 제안은 소비자향 자연어 설명 + 개선 시뮬레이션 + 공정성 감사를 하나의 신뢰 계층으로 통합하고, 법 조문 구조(결과·기준·개선·권리)로 출력.</a:t>
+              <a:t>A.  현행은 내부 검증·부정사유 코드 생성용. 본 제안은 소비자향 자연어 설명 + 개선 시뮬레이션을 하나의 신뢰 계층으로 통합하고, 법 조문 구조(결과·기준·개선·권리)로 출력.</a:t>
             </a:r>
             <a:endParaRPr lang="en-US" sz="1250" dirty="0"/>
           </a:p>
@@ -7012,7 +5986,7 @@
                 <a:ea typeface="Malgun Gothic" pitchFamily="34" charset="-122"/>
                 <a:cs typeface="Malgun Gothic" pitchFamily="34" charset="-120"/>
               </a:rPr>
-              <a:t>연결고리:  </a:t>
+              <a:t>두 파트의 연결:  </a:t>
             </a:r>
             <a:pPr indent="0" marL="0">
               <a:lnSpc>
@@ -7029,7 +6003,7 @@
                 <a:ea typeface="Malgun Gothic" pitchFamily="34" charset="-122"/>
                 <a:cs typeface="Malgun Gothic" pitchFamily="34" charset="-120"/>
               </a:rPr>
-              <a:t>실습 보고서가 '추가 개선 여지'로 남긴 두 가지 — 설명가능성(SHAP)과 공정성 점검 — 그 숙제를 이어서 푼 것이 Part 2입니다.</a:t>
+              <a:t>Part 2는 Part 1에서 만든 데이터와 개선 모형을 그대로 가져와, 그 위에 설명을 위한 '신뢰 계층'을 새로 설계합니다.</a:t>
             </a:r>
             <a:endParaRPr lang="en-US" sz="1400" dirty="0"/>
           </a:p>
@@ -9624,7 +8598,7 @@
               <a:buNone/>
             </a:pPr>
             <a:r>
-              <a:rPr lang="en-US" sz="2800" b="1" dirty="0">
+              <a:rPr lang="en-US" sz="2700" b="1" dirty="0">
                 <a:solidFill>
                   <a:srgbClr val="1A1A1A"/>
                 </a:solidFill>
@@ -9632,9 +8606,9 @@
                 <a:ea typeface="Malgun Gothic" pitchFamily="34" charset="-122"/>
                 <a:cs typeface="Malgun Gothic" pitchFamily="34" charset="-120"/>
               </a:rPr>
-              <a:t>성능은 만들었다 — 그런데, 설명할 수 있는가?</a:t>
-            </a:r>
-            <a:endParaRPr lang="en-US" sz="2800" dirty="0"/>
+              <a:t>Part 2 — 문제 제기: 성능 좋은 AI는 왜 설명하지 못하는가</a:t>
+            </a:r>
+            <a:endParaRPr lang="en-US" sz="2700" dirty="0"/>
           </a:p>
         </p:txBody>
       </p:sp>
@@ -9646,12 +8620,12 @@
         </p:nvSpPr>
         <p:spPr>
           <a:xfrm>
-            <a:off x="640080" y="1417320"/>
-            <a:ext cx="5394960" cy="4114800"/>
+            <a:off x="640080" y="1554480"/>
+            <a:ext cx="5394960" cy="3108960"/>
           </a:xfrm>
           <a:prstGeom prst="roundRect">
             <a:avLst>
-              <a:gd name="adj" fmla="val 2667"/>
+              <a:gd name="adj" fmla="val 3529"/>
             </a:avLst>
           </a:prstGeom>
           <a:solidFill>
@@ -9673,47 +8647,187 @@
         </p:nvSpPr>
         <p:spPr>
           <a:xfrm>
-            <a:off x="960120" y="1645920"/>
-            <a:ext cx="4754880" cy="411480"/>
-          </a:xfrm>
-          <a:prstGeom prst="rect">
-            <a:avLst/>
-          </a:prstGeom>
-          <a:noFill/>
-          <a:ln/>
-        </p:spPr>
-        <p:txBody>
-          <a:bodyPr wrap="square" lIns="0" tIns="0" rIns="0" bIns="0" rtlCol="0" anchor="ctr"/>
-          <a:lstStyle/>
-          <a:p>
-            <a:pPr indent="0" marL="0">
-              <a:buNone/>
-            </a:pPr>
-            <a:r>
-              <a:rPr lang="en-US" sz="1500" b="1" dirty="0">
-                <a:solidFill>
-                  <a:srgbClr val="1E2761"/>
-                </a:solidFill>
-                <a:latin typeface="Malgun Gothic" pitchFamily="34" charset="0"/>
-                <a:ea typeface="Malgun Gothic" pitchFamily="34" charset="-122"/>
-                <a:cs typeface="Malgun Gothic" pitchFamily="34" charset="-120"/>
-              </a:rPr>
-              <a:t>실습 보고서 §5 — "추가 개선 여지"</a:t>
-            </a:r>
-            <a:endParaRPr lang="en-US" sz="1500" dirty="0"/>
-          </a:p>
-        </p:txBody>
-      </p:sp>
-      <p:sp>
-        <p:nvSpPr>
-          <p:cNvPr id="5" name="Text 3"/>
-          <p:cNvSpPr/>
-          <p:nvPr/>
-        </p:nvSpPr>
-        <p:spPr>
-          <a:xfrm>
-            <a:off x="960120" y="2194560"/>
-            <a:ext cx="4800600" cy="2286000"/>
+            <a:off x="1005840" y="1920240"/>
+            <a:ext cx="4754880" cy="2468880"/>
+          </a:xfrm>
+          <a:prstGeom prst="rect">
+            <a:avLst/>
+          </a:prstGeom>
+          <a:noFill/>
+          <a:ln/>
+        </p:spPr>
+        <p:txBody>
+          <a:bodyPr wrap="square" lIns="0" tIns="0" rIns="0" bIns="0" rtlCol="0" anchor="ctr"/>
+          <a:lstStyle/>
+          <a:p>
+            <a:pPr indent="0" marL="0">
+              <a:lnSpc>
+                <a:spcPct val="118000"/>
+              </a:lnSpc>
+              <a:buNone/>
+            </a:pPr>
+            <a:r>
+              <a:rPr lang="en-US" sz="1300" dirty="0">
+                <a:solidFill>
+                  <a:srgbClr val="6B6B6B"/>
+                </a:solidFill>
+                <a:latin typeface="Malgun Gothic" pitchFamily="34" charset="0"/>
+                <a:ea typeface="Malgun Gothic" pitchFamily="34" charset="-122"/>
+                <a:cs typeface="Malgun Gothic" pitchFamily="34" charset="-120"/>
+              </a:rPr>
+              <a:t>[Web발신] OO은행
+</a:t>
+            </a:r>
+            <a:pPr indent="0" marL="0">
+              <a:lnSpc>
+                <a:spcPct val="118000"/>
+              </a:lnSpc>
+              <a:buNone/>
+            </a:pPr>
+            <a:r>
+              <a:rPr lang="en-US" sz="2000" b="1" dirty="0">
+                <a:solidFill>
+                  <a:srgbClr val="1A1A1A"/>
+                </a:solidFill>
+                <a:latin typeface="Malgun Gothic" pitchFamily="34" charset="0"/>
+                <a:ea typeface="Malgun Gothic" pitchFamily="34" charset="-122"/>
+                <a:cs typeface="Malgun Gothic" pitchFamily="34" charset="-120"/>
+              </a:rPr>
+              <a:t>고객님의 대출 신청이 거절되었습니다.
+</a:t>
+            </a:r>
+            <a:pPr indent="0" marL="0">
+              <a:lnSpc>
+                <a:spcPct val="118000"/>
+              </a:lnSpc>
+              <a:buNone/>
+            </a:pPr>
+            <a:r>
+              <a:rPr lang="en-US" sz="2000" b="1" dirty="0">
+                <a:solidFill>
+                  <a:srgbClr val="1A1A1A"/>
+                </a:solidFill>
+                <a:latin typeface="Malgun Gothic" pitchFamily="34" charset="0"/>
+                <a:ea typeface="Malgun Gothic" pitchFamily="34" charset="-122"/>
+                <a:cs typeface="Malgun Gothic" pitchFamily="34" charset="-120"/>
+              </a:rPr>
+              <a:t>사유: 신용평점 미달
+</a:t>
+            </a:r>
+            <a:pPr indent="0" marL="0">
+              <a:lnSpc>
+                <a:spcPct val="118000"/>
+              </a:lnSpc>
+              <a:buNone/>
+            </a:pPr>
+            <a:r>
+              <a:rPr lang="en-US" sz="1600" i="1" dirty="0">
+                <a:solidFill>
+                  <a:srgbClr val="E34948"/>
+                </a:solidFill>
+                <a:latin typeface="Malgun Gothic" pitchFamily="34" charset="0"/>
+                <a:ea typeface="Malgun Gothic" pitchFamily="34" charset="-122"/>
+                <a:cs typeface="Malgun Gothic" pitchFamily="34" charset="-120"/>
+              </a:rPr>
+              <a:t>…설명은 여기까지입니다.</a:t>
+            </a:r>
+            <a:endParaRPr lang="en-US" sz="1300" dirty="0"/>
+          </a:p>
+        </p:txBody>
+      </p:sp>
+      <p:sp>
+        <p:nvSpPr>
+          <p:cNvPr id="5" name="Shape 3"/>
+          <p:cNvSpPr/>
+          <p:nvPr/>
+        </p:nvSpPr>
+        <p:spPr>
+          <a:xfrm>
+            <a:off x="6400800" y="1600200"/>
+            <a:ext cx="475488" cy="475488"/>
+          </a:xfrm>
+          <a:prstGeom prst="ellipse">
+            <a:avLst/>
+          </a:prstGeom>
+          <a:solidFill>
+            <a:srgbClr val="E34948"/>
+          </a:solidFill>
+          <a:ln/>
+        </p:spPr>
+      </p:sp>
+      <p:pic>
+        <p:nvPicPr>
+          <p:cNvPr id="6" name="Image 0" descr="/home/claude/icon_lock.png">    </p:cNvPr>
+          <p:cNvPicPr>
+            <a:picLocks noChangeAspect="1"/>
+          </p:cNvPicPr>
+          <p:nvPr/>
+        </p:nvPicPr>
+        <p:blipFill>
+          <a:blip r:embed="rId1"/>
+          <a:stretch>
+            <a:fillRect/>
+          </a:stretch>
+        </p:blipFill>
+        <p:spPr>
+          <a:xfrm>
+            <a:off x="6519672" y="1719072"/>
+            <a:ext cx="237744" cy="237744"/>
+          </a:xfrm>
+          <a:prstGeom prst="rect">
+            <a:avLst/>
+          </a:prstGeom>
+        </p:spPr>
+      </p:pic>
+      <p:sp>
+        <p:nvSpPr>
+          <p:cNvPr id="7" name="Text 4"/>
+          <p:cNvSpPr/>
+          <p:nvPr/>
+        </p:nvSpPr>
+        <p:spPr>
+          <a:xfrm>
+            <a:off x="7013448" y="1636776"/>
+            <a:ext cx="4389120" cy="411480"/>
+          </a:xfrm>
+          <a:prstGeom prst="rect">
+            <a:avLst/>
+          </a:prstGeom>
+          <a:noFill/>
+          <a:ln/>
+        </p:spPr>
+        <p:txBody>
+          <a:bodyPr wrap="square" lIns="0" tIns="0" rIns="0" bIns="0" rtlCol="0" anchor="ctr"/>
+          <a:lstStyle/>
+          <a:p>
+            <a:pPr indent="0" marL="0">
+              <a:buNone/>
+            </a:pPr>
+            <a:r>
+              <a:rPr lang="en-US" sz="1700" b="1" dirty="0">
+                <a:solidFill>
+                  <a:srgbClr val="8E1F1F"/>
+                </a:solidFill>
+                <a:latin typeface="Malgun Gothic" pitchFamily="34" charset="0"/>
+                <a:ea typeface="Malgun Gothic" pitchFamily="34" charset="-122"/>
+                <a:cs typeface="Malgun Gothic" pitchFamily="34" charset="-120"/>
+              </a:rPr>
+              <a:t>AI의 설명력 부족</a:t>
+            </a:r>
+            <a:endParaRPr lang="en-US" sz="1700" dirty="0"/>
+          </a:p>
+        </p:txBody>
+      </p:sp>
+      <p:sp>
+        <p:nvSpPr>
+          <p:cNvPr id="8" name="Text 5"/>
+          <p:cNvSpPr/>
+          <p:nvPr/>
+        </p:nvSpPr>
+        <p:spPr>
+          <a:xfrm>
+            <a:off x="6400800" y="2286000"/>
+            <a:ext cx="5120640" cy="2468880"/>
           </a:xfrm>
           <a:prstGeom prst="rect">
             <a:avLst/>
@@ -9735,13 +8849,13 @@
             <a:r>
               <a:rPr lang="en-US" sz="1350" dirty="0">
                 <a:solidFill>
-                  <a:srgbClr val="6B6B6B"/>
-                </a:solidFill>
-                <a:latin typeface="Malgun Gothic" pitchFamily="34" charset="0"/>
-                <a:ea typeface="Malgun Gothic" pitchFamily="34" charset="-122"/>
-                <a:cs typeface="Malgun Gothic" pitchFamily="34" charset="-120"/>
-              </a:rPr>
-              <a:t>시점 외 검증(OOT) — 데이터에 시점 변수 부재로 미수행</a:t>
+                  <a:srgbClr val="1A1A1A"/>
+                </a:solidFill>
+                <a:latin typeface="Malgun Gothic" pitchFamily="34" charset="0"/>
+                <a:ea typeface="Malgun Gothic" pitchFamily="34" charset="-122"/>
+                <a:cs typeface="Malgun Gothic" pitchFamily="34" charset="-120"/>
+              </a:rPr>
+              <a:t>성능 좋은 AI 모형(트리 앙상블)은 블랙박스 — 성능이 오를수록 '왜'는 멀어지는 trade-off</a:t>
             </a:r>
             <a:endParaRPr lang="en-US" sz="1350" dirty="0"/>
           </a:p>
@@ -9756,13 +8870,13 @@
             <a:r>
               <a:rPr lang="en-US" sz="1350" dirty="0">
                 <a:solidFill>
-                  <a:srgbClr val="6B6B6B"/>
-                </a:solidFill>
-                <a:latin typeface="Malgun Gothic" pitchFamily="34" charset="0"/>
-                <a:ea typeface="Malgun Gothic" pitchFamily="34" charset="-122"/>
-                <a:cs typeface="Malgun Gothic" pitchFamily="34" charset="-120"/>
-              </a:rPr>
-              <a:t>스코어카드화 — PD 구간화·PSI 모니터링</a:t>
+                  <a:srgbClr val="1A1A1A"/>
+                </a:solidFill>
+                <a:latin typeface="Malgun Gothic" pitchFamily="34" charset="0"/>
+                <a:ea typeface="Malgun Gothic" pitchFamily="34" charset="-122"/>
+                <a:cs typeface="Malgun Gothic" pitchFamily="34" charset="-120"/>
+              </a:rPr>
+              <a:t>그래서 소비자가 받는 설명은 '부정사유 코드' 수준에 머무름</a:t>
             </a:r>
             <a:endParaRPr lang="en-US" sz="1350" dirty="0"/>
           </a:p>
@@ -9777,110 +8891,50 @@
             <a:r>
               <a:rPr lang="en-US" sz="1350" b="1" dirty="0">
                 <a:solidFill>
-                  <a:srgbClr val="2A78D6"/>
-                </a:solidFill>
-                <a:latin typeface="Malgun Gothic" pitchFamily="34" charset="0"/>
-                <a:ea typeface="Malgun Gothic" pitchFamily="34" charset="-122"/>
-                <a:cs typeface="Malgun Gothic" pitchFamily="34" charset="-120"/>
-              </a:rPr>
-              <a:t>설명가능성 — SHAP 기반 변수 기여도로 금융소비자 설명의무 대응</a:t>
+                  <a:srgbClr val="1E2761"/>
+                </a:solidFill>
+                <a:latin typeface="Malgun Gothic" pitchFamily="34" charset="0"/>
+                <a:ea typeface="Malgun Gothic" pitchFamily="34" charset="-122"/>
+                <a:cs typeface="Malgun Gothic" pitchFamily="34" charset="-120"/>
+              </a:rPr>
+              <a:t>그런데 법은 설명을 요구함 — "자동화 평가의 결과·주요 기준·기초정보에 대해 설명을 요구할 수 있다" (신용정보법 제36조의2)</a:t>
             </a:r>
             <a:endParaRPr lang="en-US" sz="1350" dirty="0"/>
           </a:p>
-          <a:p>
-            <a:pPr marL="342900" indent="-342900">
-              <a:spcAft>
-                <a:spcPts val="1200"/>
-              </a:spcAft>
-              <a:buSzPct val="100000"/>
-              <a:buChar char="•"/>
-            </a:pPr>
-            <a:r>
-              <a:rPr lang="en-US" sz="1350" b="1" dirty="0">
-                <a:solidFill>
-                  <a:srgbClr val="2A78D6"/>
-                </a:solidFill>
-                <a:latin typeface="Malgun Gothic" pitchFamily="34" charset="0"/>
-                <a:ea typeface="Malgun Gothic" pitchFamily="34" charset="-122"/>
-                <a:cs typeface="Malgun Gothic" pitchFamily="34" charset="-120"/>
-              </a:rPr>
-              <a:t>공정성 점검 — 특정 집단에 대한 불합리한 차별 여부 검증</a:t>
-            </a:r>
-            <a:endParaRPr lang="en-US" sz="1350" dirty="0"/>
-          </a:p>
-        </p:txBody>
-      </p:sp>
-      <p:sp>
-        <p:nvSpPr>
-          <p:cNvPr id="6" name="Text 4"/>
-          <p:cNvSpPr/>
-          <p:nvPr/>
-        </p:nvSpPr>
-        <p:spPr>
-          <a:xfrm>
-            <a:off x="960120" y="4892040"/>
-            <a:ext cx="4754880" cy="457200"/>
-          </a:xfrm>
-          <a:prstGeom prst="rect">
-            <a:avLst/>
-          </a:prstGeom>
-          <a:noFill/>
-          <a:ln/>
-        </p:spPr>
-        <p:txBody>
-          <a:bodyPr wrap="square" lIns="0" tIns="0" rIns="0" bIns="0" rtlCol="0" anchor="ctr"/>
-          <a:lstStyle/>
-          <a:p>
-            <a:pPr indent="0" marL="0">
-              <a:buNone/>
-            </a:pPr>
-            <a:r>
-              <a:rPr lang="en-US" sz="1400" b="1" dirty="0">
-                <a:solidFill>
-                  <a:srgbClr val="2A78D6"/>
-                </a:solidFill>
-                <a:latin typeface="Malgun Gothic" pitchFamily="34" charset="0"/>
-                <a:ea typeface="Malgun Gothic" pitchFamily="34" charset="-122"/>
-                <a:cs typeface="Malgun Gothic" pitchFamily="34" charset="-120"/>
-              </a:rPr>
-              <a:t>→ 이 두 줄이 Part 2의 출발점이 되었습니다.</a:t>
-            </a:r>
-            <a:endParaRPr lang="en-US" sz="1400" dirty="0"/>
-          </a:p>
-        </p:txBody>
-      </p:sp>
-      <p:sp>
-        <p:nvSpPr>
-          <p:cNvPr id="7" name="Shape 5"/>
-          <p:cNvSpPr/>
-          <p:nvPr/>
-        </p:nvSpPr>
-        <p:spPr>
-          <a:xfrm>
-            <a:off x="6400800" y="1417320"/>
-            <a:ext cx="5166360" cy="1965960"/>
+        </p:txBody>
+      </p:sp>
+      <p:sp>
+        <p:nvSpPr>
+          <p:cNvPr id="9" name="Shape 6"/>
+          <p:cNvSpPr/>
+          <p:nvPr/>
+        </p:nvSpPr>
+        <p:spPr>
+          <a:xfrm>
+            <a:off x="640080" y="5120640"/>
+            <a:ext cx="10927080" cy="822960"/>
           </a:xfrm>
           <a:prstGeom prst="roundRect">
             <a:avLst>
-              <a:gd name="adj" fmla="val 5581"/>
+              <a:gd name="adj" fmla="val 11111"/>
             </a:avLst>
           </a:prstGeom>
           <a:solidFill>
-            <a:srgbClr val="FBEBEB"/>
+            <a:srgbClr val="1E2761"/>
           </a:solidFill>
           <a:ln/>
         </p:spPr>
       </p:sp>
       <p:sp>
         <p:nvSpPr>
-          <p:cNvPr id="8" name="Text 6"/>
-          <p:cNvSpPr/>
-          <p:nvPr/>
-        </p:nvSpPr>
-        <p:spPr>
-          <a:xfrm>
-            <a:off x="6720840" y="1645920"/>
-            <a:ext cx="4572000" cy="1600200"/>
+          <p:cNvPr id="10" name="Text 7"/>
+          <p:cNvSpPr/>
+          <p:nvPr/>
+        </p:nvSpPr>
+        <p:spPr>
+          <a:xfrm>
+            <a:off x="914400" y="5120640"/>
+            <a:ext cx="10424160" cy="822960"/>
           </a:xfrm>
           <a:prstGeom prst="rect">
             <a:avLst/>
@@ -9894,143 +8948,39 @@
           <a:p>
             <a:pPr indent="0" marL="0">
               <a:lnSpc>
-                <a:spcPct val="115000"/>
+                <a:spcPct val="110000"/>
               </a:lnSpc>
               <a:buNone/>
             </a:pPr>
             <a:r>
-              <a:rPr lang="en-US" sz="1100" dirty="0">
-                <a:solidFill>
-                  <a:srgbClr val="6B6B6B"/>
-                </a:solidFill>
-                <a:latin typeface="Malgun Gothic" pitchFamily="34" charset="0"/>
-                <a:ea typeface="Malgun Gothic" pitchFamily="34" charset="-122"/>
-                <a:cs typeface="Malgun Gothic" pitchFamily="34" charset="-120"/>
-              </a:rPr>
-              <a:t>[Web발신] OO은행
-</a:t>
+              <a:rPr lang="en-US" sz="1350" dirty="0">
+                <a:solidFill>
+                  <a:srgbClr val="CADCFC"/>
+                </a:solidFill>
+                <a:latin typeface="Malgun Gothic" pitchFamily="34" charset="0"/>
+                <a:ea typeface="Malgun Gothic" pitchFamily="34" charset="-122"/>
+                <a:cs typeface="Malgun Gothic" pitchFamily="34" charset="-120"/>
+              </a:rPr>
+              <a:t>Part 1에서 가져온 것은 데이터(AI Play DB)와 개선 모형뿐 — </a:t>
             </a:r>
             <a:pPr indent="0" marL="0">
               <a:lnSpc>
-                <a:spcPct val="115000"/>
+                <a:spcPct val="110000"/>
               </a:lnSpc>
               <a:buNone/>
             </a:pPr>
             <a:r>
-              <a:rPr lang="en-US" sz="1600" b="1" dirty="0">
-                <a:solidFill>
-                  <a:srgbClr val="1A1A1A"/>
-                </a:solidFill>
-                <a:latin typeface="Malgun Gothic" pitchFamily="34" charset="0"/>
-                <a:ea typeface="Malgun Gothic" pitchFamily="34" charset="-122"/>
-                <a:cs typeface="Malgun Gothic" pitchFamily="34" charset="-120"/>
-              </a:rPr>
-              <a:t>고객님의 대출 신청이 거절되었습니다.
-사유: 신용평점 미달
-</a:t>
-            </a:r>
-            <a:pPr indent="0" marL="0">
-              <a:lnSpc>
-                <a:spcPct val="115000"/>
-              </a:lnSpc>
-              <a:buNone/>
-            </a:pPr>
-            <a:r>
-              <a:rPr lang="en-US" sz="1300" i="1" dirty="0">
-                <a:solidFill>
-                  <a:srgbClr val="E34948"/>
-                </a:solidFill>
-                <a:latin typeface="Malgun Gothic" pitchFamily="34" charset="0"/>
-                <a:ea typeface="Malgun Gothic" pitchFamily="34" charset="-122"/>
-                <a:cs typeface="Malgun Gothic" pitchFamily="34" charset="-120"/>
-              </a:rPr>
-              <a:t>…설명은 여기까지입니다.</a:t>
-            </a:r>
-            <a:endParaRPr lang="en-US" sz="1100" dirty="0"/>
-          </a:p>
-        </p:txBody>
-      </p:sp>
-      <p:sp>
-        <p:nvSpPr>
-          <p:cNvPr id="9" name="Text 7"/>
-          <p:cNvSpPr/>
-          <p:nvPr/>
-        </p:nvSpPr>
-        <p:spPr>
-          <a:xfrm>
-            <a:off x="6400800" y="3657600"/>
-            <a:ext cx="5166360" cy="2011680"/>
-          </a:xfrm>
-          <a:prstGeom prst="rect">
-            <a:avLst/>
-          </a:prstGeom>
-          <a:noFill/>
-          <a:ln/>
-        </p:spPr>
-        <p:txBody>
-          <a:bodyPr wrap="square" lIns="0" tIns="0" rIns="0" bIns="0" rtlCol="0" anchor="ctr"/>
-          <a:lstStyle/>
-          <a:p>
-            <a:pPr indent="0" marL="0">
-              <a:lnSpc>
-                <a:spcPct val="120000"/>
-              </a:lnSpc>
-              <a:buNone/>
-            </a:pPr>
-            <a:r>
-              <a:rPr lang="en-US" sz="1450" b="1" dirty="0">
-                <a:solidFill>
-                  <a:srgbClr val="1A1A1A"/>
-                </a:solidFill>
-                <a:latin typeface="Malgun Gothic" pitchFamily="34" charset="0"/>
-                <a:ea typeface="Malgun Gothic" pitchFamily="34" charset="-122"/>
-                <a:cs typeface="Malgun Gothic" pitchFamily="34" charset="-120"/>
-              </a:rPr>
-              <a:t>AUC 0.9247의 개선 모형도 이 질문에는 답하지 못합니다.
-</a:t>
-            </a:r>
-            <a:endParaRPr lang="en-US" sz="1450" dirty="0"/>
-          </a:p>
-          <a:p>
-            <a:pPr indent="0" marL="0">
-              <a:lnSpc>
-                <a:spcPct val="120000"/>
-              </a:lnSpc>
-              <a:buNone/>
-            </a:pPr>
-            <a:r>
-              <a:rPr lang="en-US" sz="1300" dirty="0">
-                <a:solidFill>
-                  <a:srgbClr val="6B6B6B"/>
-                </a:solidFill>
-                <a:latin typeface="Malgun Gothic" pitchFamily="34" charset="0"/>
-                <a:ea typeface="Malgun Gothic" pitchFamily="34" charset="-122"/>
-                <a:cs typeface="Malgun Gothic" pitchFamily="34" charset="-120"/>
-              </a:rPr>
-              <a:t>20개 트리 앙상블 = 블랙박스 — 성능이 오를수록 '왜'는 멀어집니다.
-</a:t>
-            </a:r>
-            <a:endParaRPr lang="en-US" sz="1450" dirty="0"/>
-          </a:p>
-          <a:p>
-            <a:pPr indent="0" marL="0">
-              <a:lnSpc>
-                <a:spcPct val="120000"/>
-              </a:lnSpc>
-              <a:buNone/>
-            </a:pPr>
-            <a:r>
-              <a:rPr lang="en-US" sz="1300" i="1" dirty="0">
-                <a:solidFill>
-                  <a:srgbClr val="1E2761"/>
-                </a:solidFill>
-                <a:latin typeface="Malgun Gothic" pitchFamily="34" charset="0"/>
-                <a:ea typeface="Malgun Gothic" pitchFamily="34" charset="-122"/>
-                <a:cs typeface="Malgun Gothic" pitchFamily="34" charset="-120"/>
-              </a:rPr>
-              <a:t>“개인은 자동화된 신용평가의 결과, 주요 기준, 기초정보에 대해 설명을 요구할 수 있다.”  — 신용정보법 제36조의2</a:t>
-            </a:r>
-            <a:endParaRPr lang="en-US" sz="1450" dirty="0"/>
+              <a:rPr lang="en-US" sz="1350" b="1" dirty="0">
+                <a:solidFill>
+                  <a:srgbClr val="FFFFFF"/>
+                </a:solidFill>
+                <a:latin typeface="Malgun Gothic" pitchFamily="34" charset="0"/>
+                <a:ea typeface="Malgun Gothic" pitchFamily="34" charset="-122"/>
+                <a:cs typeface="Malgun Gothic" pitchFamily="34" charset="-120"/>
+              </a:rPr>
+              <a:t>이 문제를 푸는 '설명 계층'을 그 위에 새로 설계했습니다: Credit Explainer</a:t>
+            </a:r>
+            <a:endParaRPr lang="en-US" sz="1350" dirty="0"/>
           </a:p>
         </p:txBody>
       </p:sp>
@@ -11617,7 +10567,7 @@
                 <a:ea typeface="Malgun Gothic" pitchFamily="34" charset="-122"/>
                 <a:cs typeface="Malgun Gothic" pitchFamily="34" charset="-120"/>
               </a:rPr>
-              <a:t>공정성 감사 · 캐시</a:t>
+              <a:t>발표장 캐시 재생</a:t>
             </a:r>
             <a:endParaRPr lang="en-US" sz="1200" dirty="0"/>
           </a:p>
@@ -12991,27 +11941,6 @@
                 <a:cs typeface="Malgun Gothic" pitchFamily="34" charset="-120"/>
               </a:rPr>
               <a:t>캐시 모드: 발표장 네트워크 없이도 재생 (API 호출 0회 검증)</a:t>
-            </a:r>
-            <a:endParaRPr lang="en-US" sz="1300" dirty="0"/>
-          </a:p>
-          <a:p>
-            <a:pPr marL="342900" indent="-342900">
-              <a:spcAft>
-                <a:spcPts val="700"/>
-              </a:spcAft>
-              <a:buSzPct val="100000"/>
-              <a:buChar char="•"/>
-            </a:pPr>
-            <a:r>
-              <a:rPr lang="en-US" sz="1300" dirty="0">
-                <a:solidFill>
-                  <a:srgbClr val="1A1A1A"/>
-                </a:solidFill>
-                <a:latin typeface="Malgun Gothic" pitchFamily="34" charset="0"/>
-                <a:ea typeface="Malgun Gothic" pitchFamily="34" charset="-122"/>
-                <a:cs typeface="Malgun Gothic" pitchFamily="34" charset="-120"/>
-              </a:rPr>
-              <a:t>공정성 감사: 그룹별 세분화 평가 상시 산출 (다음 슬라이드)</a:t>
             </a:r>
             <a:endParaRPr lang="en-US" sz="1300" dirty="0"/>
           </a:p>
